--- a/docs/pptx/auc3/ritu-auc3-linsubhr-dosedisc-akikdigo.pptx
+++ b/docs/pptx/auc3/ritu-auc3-linsubhr-dosedisc-akikdigo.pptx
@@ -2443,7 +2443,7 @@
           </p:nvSpPr>
           <p:spPr>
             <a:xfrm>
-              <a:off x="980186" y="1896563"/>
+              <a:off x="980739" y="1896563"/>
               <a:ext cx="0" cy="3826579"/>
             </a:xfrm>
             <a:custGeom>
@@ -2486,7 +2486,7 @@
           </p:nvSpPr>
           <p:spPr>
             <a:xfrm>
-              <a:off x="3262630" y="1896563"/>
+              <a:off x="3260798" y="1896563"/>
               <a:ext cx="0" cy="3826579"/>
             </a:xfrm>
             <a:custGeom>
@@ -2529,7 +2529,7 @@
           </p:nvSpPr>
           <p:spPr>
             <a:xfrm>
-              <a:off x="5545073" y="1896563"/>
+              <a:off x="5540858" y="1896563"/>
               <a:ext cx="0" cy="3826579"/>
             </a:xfrm>
             <a:custGeom>
@@ -2572,7 +2572,7 @@
           </p:nvSpPr>
           <p:spPr>
             <a:xfrm>
-              <a:off x="7827517" y="1896563"/>
+              <a:off x="7820918" y="1896563"/>
               <a:ext cx="0" cy="3826579"/>
             </a:xfrm>
             <a:custGeom>
@@ -2830,7 +2830,7 @@
           </p:nvSpPr>
           <p:spPr>
             <a:xfrm>
-              <a:off x="2121408" y="1896563"/>
+              <a:off x="2120768" y="1896563"/>
               <a:ext cx="0" cy="3826579"/>
             </a:xfrm>
             <a:custGeom>
@@ -2873,7 +2873,7 @@
           </p:nvSpPr>
           <p:spPr>
             <a:xfrm>
-              <a:off x="4403852" y="1896563"/>
+              <a:off x="4400828" y="1896563"/>
               <a:ext cx="0" cy="3826579"/>
             </a:xfrm>
             <a:custGeom>
@@ -2916,7 +2916,7 @@
           </p:nvSpPr>
           <p:spPr>
             <a:xfrm>
-              <a:off x="6686295" y="1896563"/>
+              <a:off x="6680888" y="1896563"/>
               <a:ext cx="0" cy="3826579"/>
             </a:xfrm>
             <a:custGeom>
@@ -2960,527 +2960,527 @@
           <p:spPr>
             <a:xfrm>
               <a:off x="1172049" y="1896563"/>
-              <a:ext cx="7090630" cy="3584524"/>
+              <a:ext cx="7090630" cy="3582480"/>
             </a:xfrm>
             <a:custGeom>
               <a:avLst/>
               <a:pathLst>
-                <a:path w="7090630" h="3584524">
+                <a:path w="7090630" h="3582480">
                   <a:moveTo>
-                    <a:pt x="0" y="827684"/>
+                    <a:pt x="0" y="866046"/>
                   </a:moveTo>
                   <a:lnTo>
-                    <a:pt x="71622" y="901145"/>
-                  </a:lnTo>
-                  <a:lnTo>
-                    <a:pt x="143245" y="972696"/>
-                  </a:lnTo>
-                  <a:lnTo>
-                    <a:pt x="214867" y="1042386"/>
-                  </a:lnTo>
-                  <a:lnTo>
-                    <a:pt x="286490" y="1110264"/>
-                  </a:lnTo>
-                  <a:lnTo>
-                    <a:pt x="358112" y="1176377"/>
-                  </a:lnTo>
-                  <a:lnTo>
-                    <a:pt x="429735" y="1240771"/>
-                  </a:lnTo>
-                  <a:lnTo>
-                    <a:pt x="501357" y="1303490"/>
-                  </a:lnTo>
-                  <a:lnTo>
-                    <a:pt x="572980" y="1364578"/>
-                  </a:lnTo>
-                  <a:lnTo>
-                    <a:pt x="644602" y="1424078"/>
-                  </a:lnTo>
-                  <a:lnTo>
-                    <a:pt x="716225" y="1482030"/>
-                  </a:lnTo>
-                  <a:lnTo>
-                    <a:pt x="787847" y="1538475"/>
-                  </a:lnTo>
-                  <a:lnTo>
-                    <a:pt x="859470" y="1593453"/>
-                  </a:lnTo>
-                  <a:lnTo>
-                    <a:pt x="931092" y="1647001"/>
-                  </a:lnTo>
-                  <a:lnTo>
-                    <a:pt x="1002715" y="1699156"/>
-                  </a:lnTo>
-                  <a:lnTo>
-                    <a:pt x="1074337" y="1749955"/>
-                  </a:lnTo>
-                  <a:lnTo>
-                    <a:pt x="1145960" y="1799433"/>
-                  </a:lnTo>
-                  <a:lnTo>
-                    <a:pt x="1217582" y="1847625"/>
-                  </a:lnTo>
-                  <a:lnTo>
-                    <a:pt x="1289205" y="1894563"/>
-                  </a:lnTo>
-                  <a:lnTo>
-                    <a:pt x="1360827" y="1940281"/>
-                  </a:lnTo>
-                  <a:lnTo>
-                    <a:pt x="1432450" y="1984809"/>
-                  </a:lnTo>
-                  <a:lnTo>
-                    <a:pt x="1504073" y="2028180"/>
-                  </a:lnTo>
-                  <a:lnTo>
-                    <a:pt x="1575695" y="2070423"/>
-                  </a:lnTo>
-                  <a:lnTo>
-                    <a:pt x="1647318" y="2111568"/>
-                  </a:lnTo>
-                  <a:lnTo>
-                    <a:pt x="1718940" y="2151643"/>
-                  </a:lnTo>
-                  <a:lnTo>
-                    <a:pt x="1790563" y="2190675"/>
-                  </a:lnTo>
-                  <a:lnTo>
-                    <a:pt x="1862185" y="2228693"/>
-                  </a:lnTo>
-                  <a:lnTo>
-                    <a:pt x="1933808" y="2265721"/>
-                  </a:lnTo>
-                  <a:lnTo>
-                    <a:pt x="2005430" y="2301787"/>
-                  </a:lnTo>
-                  <a:lnTo>
-                    <a:pt x="2077053" y="2336915"/>
-                  </a:lnTo>
-                  <a:lnTo>
-                    <a:pt x="2148675" y="2371130"/>
-                  </a:lnTo>
-                  <a:lnTo>
-                    <a:pt x="2220298" y="2404455"/>
-                  </a:lnTo>
-                  <a:lnTo>
-                    <a:pt x="2291920" y="2436913"/>
-                  </a:lnTo>
-                  <a:lnTo>
-                    <a:pt x="2363543" y="2468527"/>
-                  </a:lnTo>
-                  <a:lnTo>
-                    <a:pt x="2435165" y="2499320"/>
-                  </a:lnTo>
-                  <a:lnTo>
-                    <a:pt x="2506788" y="2529311"/>
-                  </a:lnTo>
-                  <a:lnTo>
-                    <a:pt x="2578410" y="2558522"/>
-                  </a:lnTo>
-                  <a:lnTo>
-                    <a:pt x="2650033" y="2586974"/>
-                  </a:lnTo>
-                  <a:lnTo>
-                    <a:pt x="2721655" y="2614686"/>
-                  </a:lnTo>
-                  <a:lnTo>
-                    <a:pt x="2793278" y="2641678"/>
-                  </a:lnTo>
-                  <a:lnTo>
-                    <a:pt x="2864901" y="2667967"/>
-                  </a:lnTo>
-                  <a:lnTo>
-                    <a:pt x="2936523" y="2693573"/>
-                  </a:lnTo>
-                  <a:lnTo>
-                    <a:pt x="3008146" y="2718513"/>
-                  </a:lnTo>
-                  <a:lnTo>
-                    <a:pt x="3079768" y="2742804"/>
-                  </a:lnTo>
-                  <a:lnTo>
-                    <a:pt x="3151391" y="2766464"/>
-                  </a:lnTo>
-                  <a:lnTo>
-                    <a:pt x="3223013" y="2768653"/>
-                  </a:lnTo>
-                  <a:lnTo>
-                    <a:pt x="3294636" y="2716839"/>
-                  </a:lnTo>
-                  <a:lnTo>
-                    <a:pt x="3366258" y="2661989"/>
-                  </a:lnTo>
-                  <a:lnTo>
-                    <a:pt x="3437881" y="2603924"/>
-                  </a:lnTo>
-                  <a:lnTo>
-                    <a:pt x="3509503" y="2542455"/>
-                  </a:lnTo>
-                  <a:lnTo>
-                    <a:pt x="3581126" y="2477383"/>
-                  </a:lnTo>
-                  <a:lnTo>
-                    <a:pt x="3652748" y="2408498"/>
-                  </a:lnTo>
-                  <a:lnTo>
-                    <a:pt x="3724371" y="2335574"/>
-                  </a:lnTo>
-                  <a:lnTo>
-                    <a:pt x="3795993" y="2258377"/>
-                  </a:lnTo>
-                  <a:lnTo>
-                    <a:pt x="3867616" y="2176655"/>
-                  </a:lnTo>
-                  <a:lnTo>
-                    <a:pt x="3939238" y="2090142"/>
-                  </a:lnTo>
-                  <a:lnTo>
-                    <a:pt x="4010861" y="1998559"/>
-                  </a:lnTo>
-                  <a:lnTo>
-                    <a:pt x="4082483" y="1901608"/>
-                  </a:lnTo>
-                  <a:lnTo>
-                    <a:pt x="4154106" y="1798975"/>
-                  </a:lnTo>
-                  <a:lnTo>
-                    <a:pt x="4225729" y="1690325"/>
-                  </a:lnTo>
-                  <a:lnTo>
-                    <a:pt x="4297351" y="1575308"/>
-                  </a:lnTo>
-                  <a:lnTo>
-                    <a:pt x="4368974" y="1453549"/>
-                  </a:lnTo>
-                  <a:lnTo>
-                    <a:pt x="4440596" y="1324653"/>
-                  </a:lnTo>
-                  <a:lnTo>
-                    <a:pt x="4512219" y="1188202"/>
-                  </a:lnTo>
-                  <a:lnTo>
-                    <a:pt x="4583841" y="1043753"/>
-                  </a:lnTo>
-                  <a:lnTo>
-                    <a:pt x="4655464" y="890838"/>
-                  </a:lnTo>
-                  <a:lnTo>
-                    <a:pt x="4727086" y="728960"/>
-                  </a:lnTo>
-                  <a:lnTo>
-                    <a:pt x="4798709" y="557594"/>
-                  </a:lnTo>
-                  <a:lnTo>
-                    <a:pt x="4870331" y="376183"/>
-                  </a:lnTo>
-                  <a:lnTo>
-                    <a:pt x="4941954" y="184140"/>
-                  </a:lnTo>
-                  <a:lnTo>
-                    <a:pt x="5006826" y="0"/>
+                    <a:pt x="71622" y="938584"/>
+                  </a:lnTo>
+                  <a:lnTo>
+                    <a:pt x="143245" y="1009234"/>
+                  </a:lnTo>
+                  <a:lnTo>
+                    <a:pt x="214867" y="1078045"/>
+                  </a:lnTo>
+                  <a:lnTo>
+                    <a:pt x="286490" y="1145065"/>
+                  </a:lnTo>
+                  <a:lnTo>
+                    <a:pt x="358112" y="1210341"/>
+                  </a:lnTo>
+                  <a:lnTo>
+                    <a:pt x="429735" y="1273917"/>
+                  </a:lnTo>
+                  <a:lnTo>
+                    <a:pt x="501357" y="1335838"/>
+                  </a:lnTo>
+                  <a:lnTo>
+                    <a:pt x="572980" y="1396147"/>
+                  </a:lnTo>
+                  <a:lnTo>
+                    <a:pt x="644602" y="1454887"/>
+                  </a:lnTo>
+                  <a:lnTo>
+                    <a:pt x="716225" y="1512097"/>
+                  </a:lnTo>
+                  <a:lnTo>
+                    <a:pt x="787847" y="1567818"/>
+                  </a:lnTo>
+                  <a:lnTo>
+                    <a:pt x="859470" y="1622088"/>
+                  </a:lnTo>
+                  <a:lnTo>
+                    <a:pt x="931092" y="1674946"/>
+                  </a:lnTo>
+                  <a:lnTo>
+                    <a:pt x="1002715" y="1726428"/>
+                  </a:lnTo>
+                  <a:lnTo>
+                    <a:pt x="1074337" y="1776570"/>
+                  </a:lnTo>
+                  <a:lnTo>
+                    <a:pt x="1145960" y="1825406"/>
+                  </a:lnTo>
+                  <a:lnTo>
+                    <a:pt x="1217582" y="1872971"/>
+                  </a:lnTo>
+                  <a:lnTo>
+                    <a:pt x="1289205" y="1919298"/>
+                  </a:lnTo>
+                  <a:lnTo>
+                    <a:pt x="1360827" y="1964420"/>
+                  </a:lnTo>
+                  <a:lnTo>
+                    <a:pt x="1432450" y="2008366"/>
+                  </a:lnTo>
+                  <a:lnTo>
+                    <a:pt x="1504073" y="2051169"/>
+                  </a:lnTo>
+                  <a:lnTo>
+                    <a:pt x="1575695" y="2092857"/>
+                  </a:lnTo>
+                  <a:lnTo>
+                    <a:pt x="1647318" y="2133460"/>
+                  </a:lnTo>
+                  <a:lnTo>
+                    <a:pt x="1718940" y="2173006"/>
+                  </a:lnTo>
+                  <a:lnTo>
+                    <a:pt x="1790563" y="2211523"/>
+                  </a:lnTo>
+                  <a:lnTo>
+                    <a:pt x="1862185" y="2249037"/>
+                  </a:lnTo>
+                  <a:lnTo>
+                    <a:pt x="1933808" y="2285575"/>
+                  </a:lnTo>
+                  <a:lnTo>
+                    <a:pt x="2005430" y="2321161"/>
+                  </a:lnTo>
+                  <a:lnTo>
+                    <a:pt x="2077053" y="2355821"/>
+                  </a:lnTo>
+                  <a:lnTo>
+                    <a:pt x="2148675" y="2389579"/>
+                  </a:lnTo>
+                  <a:lnTo>
+                    <a:pt x="2220298" y="2422458"/>
+                  </a:lnTo>
+                  <a:lnTo>
+                    <a:pt x="2291920" y="2454481"/>
+                  </a:lnTo>
+                  <a:lnTo>
+                    <a:pt x="2363543" y="2485671"/>
+                  </a:lnTo>
+                  <a:lnTo>
+                    <a:pt x="2435165" y="2516049"/>
+                  </a:lnTo>
+                  <a:lnTo>
+                    <a:pt x="2506788" y="2545636"/>
+                  </a:lnTo>
+                  <a:lnTo>
+                    <a:pt x="2578410" y="2574452"/>
+                  </a:lnTo>
+                  <a:lnTo>
+                    <a:pt x="2650033" y="2602519"/>
+                  </a:lnTo>
+                  <a:lnTo>
+                    <a:pt x="2721655" y="2629855"/>
+                  </a:lnTo>
+                  <a:lnTo>
+                    <a:pt x="2793278" y="2656479"/>
+                  </a:lnTo>
+                  <a:lnTo>
+                    <a:pt x="2864901" y="2682411"/>
+                  </a:lnTo>
+                  <a:lnTo>
+                    <a:pt x="2936523" y="2707667"/>
+                  </a:lnTo>
+                  <a:lnTo>
+                    <a:pt x="3008146" y="2732266"/>
+                  </a:lnTo>
+                  <a:lnTo>
+                    <a:pt x="3079768" y="2756225"/>
+                  </a:lnTo>
+                  <a:lnTo>
+                    <a:pt x="3151391" y="2779559"/>
+                  </a:lnTo>
+                  <a:lnTo>
+                    <a:pt x="3223013" y="2739686"/>
+                  </a:lnTo>
+                  <a:lnTo>
+                    <a:pt x="3294636" y="2686117"/>
+                  </a:lnTo>
+                  <a:lnTo>
+                    <a:pt x="3366258" y="2629405"/>
+                  </a:lnTo>
+                  <a:lnTo>
+                    <a:pt x="3437881" y="2569365"/>
+                  </a:lnTo>
+                  <a:lnTo>
+                    <a:pt x="3509503" y="2505802"/>
+                  </a:lnTo>
+                  <a:lnTo>
+                    <a:pt x="3581126" y="2438510"/>
+                  </a:lnTo>
+                  <a:lnTo>
+                    <a:pt x="3652748" y="2367269"/>
+                  </a:lnTo>
+                  <a:lnTo>
+                    <a:pt x="3724371" y="2291848"/>
+                  </a:lnTo>
+                  <a:lnTo>
+                    <a:pt x="3795993" y="2212002"/>
+                  </a:lnTo>
+                  <a:lnTo>
+                    <a:pt x="3867616" y="2127471"/>
+                  </a:lnTo>
+                  <a:lnTo>
+                    <a:pt x="3939238" y="2037979"/>
+                  </a:lnTo>
+                  <a:lnTo>
+                    <a:pt x="4010861" y="1943237"/>
+                  </a:lnTo>
+                  <a:lnTo>
+                    <a:pt x="4082483" y="1842935"/>
+                  </a:lnTo>
+                  <a:lnTo>
+                    <a:pt x="4154106" y="1736748"/>
+                  </a:lnTo>
+                  <a:lnTo>
+                    <a:pt x="4225729" y="1624331"/>
+                  </a:lnTo>
+                  <a:lnTo>
+                    <a:pt x="4297351" y="1505317"/>
+                  </a:lnTo>
+                  <a:lnTo>
+                    <a:pt x="4368974" y="1379320"/>
+                  </a:lnTo>
+                  <a:lnTo>
+                    <a:pt x="4440596" y="1245930"/>
+                  </a:lnTo>
+                  <a:lnTo>
+                    <a:pt x="4512219" y="1104713"/>
+                  </a:lnTo>
+                  <a:lnTo>
+                    <a:pt x="4583841" y="955210"/>
+                  </a:lnTo>
+                  <a:lnTo>
+                    <a:pt x="4655464" y="796935"/>
+                  </a:lnTo>
+                  <a:lnTo>
+                    <a:pt x="4727086" y="629373"/>
+                  </a:lnTo>
+                  <a:lnTo>
+                    <a:pt x="4798709" y="451979"/>
+                  </a:lnTo>
+                  <a:lnTo>
+                    <a:pt x="4870331" y="264176"/>
+                  </a:lnTo>
+                  <a:lnTo>
+                    <a:pt x="4941954" y="65353"/>
+                  </a:lnTo>
+                  <a:lnTo>
+                    <a:pt x="4964192" y="0"/>
                   </a:lnTo>
                   <a:lnTo>
                     <a:pt x="7090630" y="0"/>
                   </a:lnTo>
                   <a:lnTo>
-                    <a:pt x="7090630" y="3444598"/>
-                  </a:lnTo>
-                  <a:lnTo>
-                    <a:pt x="7019007" y="3439043"/>
-                  </a:lnTo>
-                  <a:lnTo>
-                    <a:pt x="6947385" y="3433341"/>
-                  </a:lnTo>
-                  <a:lnTo>
-                    <a:pt x="6875762" y="3427485"/>
-                  </a:lnTo>
-                  <a:lnTo>
-                    <a:pt x="6804139" y="3421474"/>
-                  </a:lnTo>
-                  <a:lnTo>
-                    <a:pt x="6732517" y="3415302"/>
-                  </a:lnTo>
-                  <a:lnTo>
-                    <a:pt x="6660894" y="3408965"/>
-                  </a:lnTo>
-                  <a:lnTo>
-                    <a:pt x="6589272" y="3402460"/>
-                  </a:lnTo>
-                  <a:lnTo>
-                    <a:pt x="6517649" y="3395780"/>
-                  </a:lnTo>
-                  <a:lnTo>
-                    <a:pt x="6446027" y="3388922"/>
-                  </a:lnTo>
-                  <a:lnTo>
-                    <a:pt x="6374404" y="3381881"/>
-                  </a:lnTo>
-                  <a:lnTo>
-                    <a:pt x="6302782" y="3374652"/>
-                  </a:lnTo>
-                  <a:lnTo>
-                    <a:pt x="6231159" y="3367230"/>
-                  </a:lnTo>
-                  <a:lnTo>
-                    <a:pt x="6159537" y="3359610"/>
-                  </a:lnTo>
-                  <a:lnTo>
-                    <a:pt x="6087914" y="3351787"/>
-                  </a:lnTo>
-                  <a:lnTo>
-                    <a:pt x="6016292" y="3343754"/>
-                  </a:lnTo>
-                  <a:lnTo>
-                    <a:pt x="5944669" y="3335507"/>
-                  </a:lnTo>
-                  <a:lnTo>
-                    <a:pt x="5873047" y="3327040"/>
-                  </a:lnTo>
-                  <a:lnTo>
-                    <a:pt x="5801424" y="3318347"/>
-                  </a:lnTo>
-                  <a:lnTo>
-                    <a:pt x="5729802" y="3309422"/>
-                  </a:lnTo>
-                  <a:lnTo>
-                    <a:pt x="5658179" y="3300258"/>
-                  </a:lnTo>
-                  <a:lnTo>
-                    <a:pt x="5586557" y="3290850"/>
-                  </a:lnTo>
-                  <a:lnTo>
-                    <a:pt x="5514934" y="3281191"/>
-                  </a:lnTo>
-                  <a:lnTo>
-                    <a:pt x="5443311" y="3271273"/>
-                  </a:lnTo>
-                  <a:lnTo>
-                    <a:pt x="5371689" y="3261091"/>
-                  </a:lnTo>
-                  <a:lnTo>
-                    <a:pt x="5300066" y="3250637"/>
-                  </a:lnTo>
-                  <a:lnTo>
-                    <a:pt x="5228444" y="3239904"/>
-                  </a:lnTo>
-                  <a:lnTo>
-                    <a:pt x="5156821" y="3228885"/>
-                  </a:lnTo>
-                  <a:lnTo>
-                    <a:pt x="5085199" y="3217571"/>
-                  </a:lnTo>
-                  <a:lnTo>
-                    <a:pt x="5013576" y="3205955"/>
-                  </a:lnTo>
-                  <a:lnTo>
-                    <a:pt x="4941954" y="3194029"/>
-                  </a:lnTo>
-                  <a:lnTo>
-                    <a:pt x="4870331" y="3181785"/>
-                  </a:lnTo>
-                  <a:lnTo>
-                    <a:pt x="4798709" y="3169214"/>
-                  </a:lnTo>
-                  <a:lnTo>
-                    <a:pt x="4727086" y="3156307"/>
-                  </a:lnTo>
-                  <a:lnTo>
-                    <a:pt x="4655464" y="3143055"/>
-                  </a:lnTo>
-                  <a:lnTo>
-                    <a:pt x="4583841" y="3129450"/>
-                  </a:lnTo>
-                  <a:lnTo>
-                    <a:pt x="4512219" y="3115482"/>
-                  </a:lnTo>
-                  <a:lnTo>
-                    <a:pt x="4440596" y="3101140"/>
-                  </a:lnTo>
-                  <a:lnTo>
-                    <a:pt x="4368974" y="3086416"/>
-                  </a:lnTo>
-                  <a:lnTo>
-                    <a:pt x="4297351" y="3071298"/>
-                  </a:lnTo>
-                  <a:lnTo>
-                    <a:pt x="4225729" y="3055777"/>
-                  </a:lnTo>
-                  <a:lnTo>
-                    <a:pt x="4154106" y="3039842"/>
-                  </a:lnTo>
-                  <a:lnTo>
-                    <a:pt x="4082483" y="3023481"/>
-                  </a:lnTo>
-                  <a:lnTo>
-                    <a:pt x="4010861" y="3006683"/>
-                  </a:lnTo>
-                  <a:lnTo>
-                    <a:pt x="3939238" y="2989437"/>
-                  </a:lnTo>
-                  <a:lnTo>
-                    <a:pt x="3867616" y="2971730"/>
-                  </a:lnTo>
-                  <a:lnTo>
-                    <a:pt x="3795993" y="2953551"/>
-                  </a:lnTo>
-                  <a:lnTo>
-                    <a:pt x="3724371" y="2934886"/>
-                  </a:lnTo>
-                  <a:lnTo>
-                    <a:pt x="3652748" y="2915723"/>
-                  </a:lnTo>
-                  <a:lnTo>
-                    <a:pt x="3581126" y="2896048"/>
-                  </a:lnTo>
-                  <a:lnTo>
-                    <a:pt x="3509503" y="2875848"/>
-                  </a:lnTo>
-                  <a:lnTo>
-                    <a:pt x="3437881" y="2855108"/>
-                  </a:lnTo>
-                  <a:lnTo>
-                    <a:pt x="3366258" y="2833815"/>
-                  </a:lnTo>
-                  <a:lnTo>
-                    <a:pt x="3294636" y="2811954"/>
-                  </a:lnTo>
-                  <a:lnTo>
-                    <a:pt x="3223013" y="2789509"/>
-                  </a:lnTo>
-                  <a:lnTo>
-                    <a:pt x="3151391" y="2817598"/>
-                  </a:lnTo>
-                  <a:lnTo>
-                    <a:pt x="3079768" y="2863832"/>
-                  </a:lnTo>
-                  <a:lnTo>
-                    <a:pt x="3008146" y="2907507"/>
-                  </a:lnTo>
-                  <a:lnTo>
-                    <a:pt x="2936523" y="2948764"/>
-                  </a:lnTo>
-                  <a:lnTo>
-                    <a:pt x="2864901" y="2987736"/>
-                  </a:lnTo>
-                  <a:lnTo>
-                    <a:pt x="2793278" y="3024550"/>
-                  </a:lnTo>
-                  <a:lnTo>
-                    <a:pt x="2721655" y="3059326"/>
-                  </a:lnTo>
-                  <a:lnTo>
-                    <a:pt x="2650033" y="3092177"/>
-                  </a:lnTo>
-                  <a:lnTo>
-                    <a:pt x="2578410" y="3123209"/>
-                  </a:lnTo>
-                  <a:lnTo>
-                    <a:pt x="2506788" y="3152523"/>
-                  </a:lnTo>
-                  <a:lnTo>
-                    <a:pt x="2435165" y="3180213"/>
-                  </a:lnTo>
-                  <a:lnTo>
-                    <a:pt x="2363543" y="3206371"/>
-                  </a:lnTo>
-                  <a:lnTo>
-                    <a:pt x="2291920" y="3231080"/>
-                  </a:lnTo>
-                  <a:lnTo>
-                    <a:pt x="2220298" y="3254421"/>
-                  </a:lnTo>
-                  <a:lnTo>
-                    <a:pt x="2148675" y="3276470"/>
-                  </a:lnTo>
-                  <a:lnTo>
-                    <a:pt x="2077053" y="3297297"/>
-                  </a:lnTo>
-                  <a:lnTo>
-                    <a:pt x="2005430" y="3316972"/>
-                  </a:lnTo>
-                  <a:lnTo>
-                    <a:pt x="1933808" y="3335558"/>
-                  </a:lnTo>
-                  <a:lnTo>
-                    <a:pt x="1862185" y="3353114"/>
-                  </a:lnTo>
-                  <a:lnTo>
-                    <a:pt x="1790563" y="3369698"/>
-                  </a:lnTo>
-                  <a:lnTo>
-                    <a:pt x="1718940" y="3385364"/>
-                  </a:lnTo>
-                  <a:lnTo>
-                    <a:pt x="1647318" y="3400163"/>
-                  </a:lnTo>
-                  <a:lnTo>
-                    <a:pt x="1575695" y="3414142"/>
-                  </a:lnTo>
-                  <a:lnTo>
-                    <a:pt x="1504073" y="3427348"/>
-                  </a:lnTo>
-                  <a:lnTo>
-                    <a:pt x="1432450" y="3439822"/>
-                  </a:lnTo>
-                  <a:lnTo>
-                    <a:pt x="1360827" y="3451605"/>
-                  </a:lnTo>
-                  <a:lnTo>
-                    <a:pt x="1289205" y="3462736"/>
-                  </a:lnTo>
-                  <a:lnTo>
-                    <a:pt x="1217582" y="3473251"/>
-                  </a:lnTo>
-                  <a:lnTo>
-                    <a:pt x="1145960" y="3483184"/>
-                  </a:lnTo>
-                  <a:lnTo>
-                    <a:pt x="1074337" y="3492566"/>
-                  </a:lnTo>
-                  <a:lnTo>
-                    <a:pt x="1002715" y="3501429"/>
-                  </a:lnTo>
-                  <a:lnTo>
-                    <a:pt x="931092" y="3509802"/>
-                  </a:lnTo>
-                  <a:lnTo>
-                    <a:pt x="859470" y="3517710"/>
-                  </a:lnTo>
-                  <a:lnTo>
-                    <a:pt x="787847" y="3525181"/>
-                  </a:lnTo>
-                  <a:lnTo>
-                    <a:pt x="716225" y="3532239"/>
-                  </a:lnTo>
-                  <a:lnTo>
-                    <a:pt x="644602" y="3538905"/>
-                  </a:lnTo>
-                  <a:lnTo>
-                    <a:pt x="572980" y="3545203"/>
-                  </a:lnTo>
-                  <a:lnTo>
-                    <a:pt x="501357" y="3551151"/>
-                  </a:lnTo>
-                  <a:lnTo>
-                    <a:pt x="429735" y="3556771"/>
-                  </a:lnTo>
-                  <a:lnTo>
-                    <a:pt x="358112" y="3562079"/>
-                  </a:lnTo>
-                  <a:lnTo>
-                    <a:pt x="286490" y="3567093"/>
-                  </a:lnTo>
-                  <a:lnTo>
-                    <a:pt x="214867" y="3571830"/>
-                  </a:lnTo>
-                  <a:lnTo>
-                    <a:pt x="143245" y="3576305"/>
-                  </a:lnTo>
-                  <a:lnTo>
-                    <a:pt x="71622" y="3580531"/>
-                  </a:lnTo>
-                  <a:lnTo>
-                    <a:pt x="0" y="3584524"/>
+                    <a:pt x="7090630" y="3447983"/>
+                  </a:lnTo>
+                  <a:lnTo>
+                    <a:pt x="7019007" y="3442513"/>
+                  </a:lnTo>
+                  <a:lnTo>
+                    <a:pt x="6947385" y="3436897"/>
+                  </a:lnTo>
+                  <a:lnTo>
+                    <a:pt x="6875762" y="3431131"/>
+                  </a:lnTo>
+                  <a:lnTo>
+                    <a:pt x="6804139" y="3425211"/>
+                  </a:lnTo>
+                  <a:lnTo>
+                    <a:pt x="6732517" y="3419132"/>
+                  </a:lnTo>
+                  <a:lnTo>
+                    <a:pt x="6660894" y="3412891"/>
+                  </a:lnTo>
+                  <a:lnTo>
+                    <a:pt x="6589272" y="3406483"/>
+                  </a:lnTo>
+                  <a:lnTo>
+                    <a:pt x="6517649" y="3399904"/>
+                  </a:lnTo>
+                  <a:lnTo>
+                    <a:pt x="6446027" y="3393149"/>
+                  </a:lnTo>
+                  <a:lnTo>
+                    <a:pt x="6374404" y="3386214"/>
+                  </a:lnTo>
+                  <a:lnTo>
+                    <a:pt x="6302782" y="3379093"/>
+                  </a:lnTo>
+                  <a:lnTo>
+                    <a:pt x="6231159" y="3371782"/>
+                  </a:lnTo>
+                  <a:lnTo>
+                    <a:pt x="6159537" y="3364275"/>
+                  </a:lnTo>
+                  <a:lnTo>
+                    <a:pt x="6087914" y="3356568"/>
+                  </a:lnTo>
+                  <a:lnTo>
+                    <a:pt x="6016292" y="3348655"/>
+                  </a:lnTo>
+                  <a:lnTo>
+                    <a:pt x="5944669" y="3340530"/>
+                  </a:lnTo>
+                  <a:lnTo>
+                    <a:pt x="5873047" y="3332188"/>
+                  </a:lnTo>
+                  <a:lnTo>
+                    <a:pt x="5801424" y="3323623"/>
+                  </a:lnTo>
+                  <a:lnTo>
+                    <a:pt x="5729802" y="3314830"/>
+                  </a:lnTo>
+                  <a:lnTo>
+                    <a:pt x="5658179" y="3305801"/>
+                  </a:lnTo>
+                  <a:lnTo>
+                    <a:pt x="5586557" y="3296531"/>
+                  </a:lnTo>
+                  <a:lnTo>
+                    <a:pt x="5514934" y="3287013"/>
+                  </a:lnTo>
+                  <a:lnTo>
+                    <a:pt x="5443311" y="3277241"/>
+                  </a:lnTo>
+                  <a:lnTo>
+                    <a:pt x="5371689" y="3267207"/>
+                  </a:lnTo>
+                  <a:lnTo>
+                    <a:pt x="5300066" y="3256906"/>
+                  </a:lnTo>
+                  <a:lnTo>
+                    <a:pt x="5228444" y="3246329"/>
+                  </a:lnTo>
+                  <a:lnTo>
+                    <a:pt x="5156821" y="3235469"/>
+                  </a:lnTo>
+                  <a:lnTo>
+                    <a:pt x="5085199" y="3224320"/>
+                  </a:lnTo>
+                  <a:lnTo>
+                    <a:pt x="5013576" y="3212872"/>
+                  </a:lnTo>
+                  <a:lnTo>
+                    <a:pt x="4941954" y="3201118"/>
+                  </a:lnTo>
+                  <a:lnTo>
+                    <a:pt x="4870331" y="3189050"/>
+                  </a:lnTo>
+                  <a:lnTo>
+                    <a:pt x="4798709" y="3176660"/>
+                  </a:lnTo>
+                  <a:lnTo>
+                    <a:pt x="4727086" y="3163938"/>
+                  </a:lnTo>
+                  <a:lnTo>
+                    <a:pt x="4655464" y="3150877"/>
+                  </a:lnTo>
+                  <a:lnTo>
+                    <a:pt x="4583841" y="3137466"/>
+                  </a:lnTo>
+                  <a:lnTo>
+                    <a:pt x="4512219" y="3123697"/>
+                  </a:lnTo>
+                  <a:lnTo>
+                    <a:pt x="4440596" y="3109560"/>
+                  </a:lnTo>
+                  <a:lnTo>
+                    <a:pt x="4368974" y="3095045"/>
+                  </a:lnTo>
+                  <a:lnTo>
+                    <a:pt x="4297351" y="3080142"/>
+                  </a:lnTo>
+                  <a:lnTo>
+                    <a:pt x="4225729" y="3064841"/>
+                  </a:lnTo>
+                  <a:lnTo>
+                    <a:pt x="4154106" y="3049130"/>
+                  </a:lnTo>
+                  <a:lnTo>
+                    <a:pt x="4082483" y="3033000"/>
+                  </a:lnTo>
+                  <a:lnTo>
+                    <a:pt x="4010861" y="3016439"/>
+                  </a:lnTo>
+                  <a:lnTo>
+                    <a:pt x="3939238" y="2999435"/>
+                  </a:lnTo>
+                  <a:lnTo>
+                    <a:pt x="3867616" y="2981977"/>
+                  </a:lnTo>
+                  <a:lnTo>
+                    <a:pt x="3795993" y="2964052"/>
+                  </a:lnTo>
+                  <a:lnTo>
+                    <a:pt x="3724371" y="2945648"/>
+                  </a:lnTo>
+                  <a:lnTo>
+                    <a:pt x="3652748" y="2926753"/>
+                  </a:lnTo>
+                  <a:lnTo>
+                    <a:pt x="3581126" y="2907352"/>
+                  </a:lnTo>
+                  <a:lnTo>
+                    <a:pt x="3509503" y="2887432"/>
+                  </a:lnTo>
+                  <a:lnTo>
+                    <a:pt x="3437881" y="2866981"/>
+                  </a:lnTo>
+                  <a:lnTo>
+                    <a:pt x="3366258" y="2845982"/>
+                  </a:lnTo>
+                  <a:lnTo>
+                    <a:pt x="3294636" y="2824423"/>
+                  </a:lnTo>
+                  <a:lnTo>
+                    <a:pt x="3223013" y="2802287"/>
+                  </a:lnTo>
+                  <a:lnTo>
+                    <a:pt x="3151391" y="2790286"/>
+                  </a:lnTo>
+                  <a:lnTo>
+                    <a:pt x="3079768" y="2838081"/>
+                  </a:lnTo>
+                  <a:lnTo>
+                    <a:pt x="3008146" y="2883227"/>
+                  </a:lnTo>
+                  <a:lnTo>
+                    <a:pt x="2936523" y="2925872"/>
+                  </a:lnTo>
+                  <a:lnTo>
+                    <a:pt x="2864901" y="2966152"/>
+                  </a:lnTo>
+                  <a:lnTo>
+                    <a:pt x="2793278" y="3004201"/>
+                  </a:lnTo>
+                  <a:lnTo>
+                    <a:pt x="2721655" y="3040140"/>
+                  </a:lnTo>
+                  <a:lnTo>
+                    <a:pt x="2650033" y="3074087"/>
+                  </a:lnTo>
+                  <a:lnTo>
+                    <a:pt x="2578410" y="3106153"/>
+                  </a:lnTo>
+                  <a:lnTo>
+                    <a:pt x="2506788" y="3136442"/>
+                  </a:lnTo>
+                  <a:lnTo>
+                    <a:pt x="2435165" y="3165052"/>
+                  </a:lnTo>
+                  <a:lnTo>
+                    <a:pt x="2363543" y="3192076"/>
+                  </a:lnTo>
+                  <a:lnTo>
+                    <a:pt x="2291920" y="3217603"/>
+                  </a:lnTo>
+                  <a:lnTo>
+                    <a:pt x="2220298" y="3241715"/>
+                  </a:lnTo>
+                  <a:lnTo>
+                    <a:pt x="2148675" y="3264490"/>
+                  </a:lnTo>
+                  <a:lnTo>
+                    <a:pt x="2077053" y="3286003"/>
+                  </a:lnTo>
+                  <a:lnTo>
+                    <a:pt x="2005430" y="3306324"/>
+                  </a:lnTo>
+                  <a:lnTo>
+                    <a:pt x="1933808" y="3325518"/>
+                  </a:lnTo>
+                  <a:lnTo>
+                    <a:pt x="1862185" y="3343649"/>
+                  </a:lnTo>
+                  <a:lnTo>
+                    <a:pt x="1790563" y="3360775"/>
+                  </a:lnTo>
+                  <a:lnTo>
+                    <a:pt x="1718940" y="3376951"/>
+                  </a:lnTo>
+                  <a:lnTo>
+                    <a:pt x="1647318" y="3392231"/>
+                  </a:lnTo>
+                  <a:lnTo>
+                    <a:pt x="1575695" y="3406664"/>
+                  </a:lnTo>
+                  <a:lnTo>
+                    <a:pt x="1504073" y="3420298"/>
+                  </a:lnTo>
+                  <a:lnTo>
+                    <a:pt x="1432450" y="3433175"/>
+                  </a:lnTo>
+                  <a:lnTo>
+                    <a:pt x="1360827" y="3445339"/>
+                  </a:lnTo>
+                  <a:lnTo>
+                    <a:pt x="1289205" y="3456829"/>
+                  </a:lnTo>
+                  <a:lnTo>
+                    <a:pt x="1217582" y="3467681"/>
+                  </a:lnTo>
+                  <a:lnTo>
+                    <a:pt x="1145960" y="3477933"/>
+                  </a:lnTo>
+                  <a:lnTo>
+                    <a:pt x="1074337" y="3487616"/>
+                  </a:lnTo>
+                  <a:lnTo>
+                    <a:pt x="1002715" y="3496763"/>
+                  </a:lnTo>
+                  <a:lnTo>
+                    <a:pt x="931092" y="3505402"/>
+                  </a:lnTo>
+                  <a:lnTo>
+                    <a:pt x="859470" y="3513563"/>
+                  </a:lnTo>
+                  <a:lnTo>
+                    <a:pt x="787847" y="3521271"/>
+                  </a:lnTo>
+                  <a:lnTo>
+                    <a:pt x="716225" y="3528552"/>
+                  </a:lnTo>
+                  <a:lnTo>
+                    <a:pt x="644602" y="3535430"/>
+                  </a:lnTo>
+                  <a:lnTo>
+                    <a:pt x="572980" y="3541926"/>
+                  </a:lnTo>
+                  <a:lnTo>
+                    <a:pt x="501357" y="3548063"/>
+                  </a:lnTo>
+                  <a:lnTo>
+                    <a:pt x="429735" y="3553859"/>
+                  </a:lnTo>
+                  <a:lnTo>
+                    <a:pt x="358112" y="3559334"/>
+                  </a:lnTo>
+                  <a:lnTo>
+                    <a:pt x="286490" y="3564506"/>
+                  </a:lnTo>
+                  <a:lnTo>
+                    <a:pt x="214867" y="3569391"/>
+                  </a:lnTo>
+                  <a:lnTo>
+                    <a:pt x="143245" y="3574005"/>
+                  </a:lnTo>
+                  <a:lnTo>
+                    <a:pt x="71622" y="3578363"/>
+                  </a:lnTo>
+                  <a:lnTo>
+                    <a:pt x="0" y="3582480"/>
                   </a:lnTo>
                   <a:close/>
                 </a:path>
@@ -3507,224 +3507,224 @@
           <p:spPr>
             <a:xfrm>
               <a:off x="1172049" y="1896563"/>
-              <a:ext cx="5006826" cy="2768653"/>
+              <a:ext cx="4964192" cy="2779559"/>
             </a:xfrm>
             <a:custGeom>
               <a:avLst/>
               <a:pathLst>
-                <a:path w="5006826" h="2768653">
+                <a:path w="4964192" h="2779559">
                   <a:moveTo>
-                    <a:pt x="0" y="827684"/>
+                    <a:pt x="0" y="866046"/>
                   </a:moveTo>
                   <a:lnTo>
-                    <a:pt x="71622" y="901145"/>
-                  </a:lnTo>
-                  <a:lnTo>
-                    <a:pt x="143245" y="972696"/>
-                  </a:lnTo>
-                  <a:lnTo>
-                    <a:pt x="214867" y="1042386"/>
-                  </a:lnTo>
-                  <a:lnTo>
-                    <a:pt x="286490" y="1110264"/>
-                  </a:lnTo>
-                  <a:lnTo>
-                    <a:pt x="358112" y="1176377"/>
-                  </a:lnTo>
-                  <a:lnTo>
-                    <a:pt x="429735" y="1240771"/>
-                  </a:lnTo>
-                  <a:lnTo>
-                    <a:pt x="501357" y="1303490"/>
-                  </a:lnTo>
-                  <a:lnTo>
-                    <a:pt x="572980" y="1364578"/>
-                  </a:lnTo>
-                  <a:lnTo>
-                    <a:pt x="644602" y="1424078"/>
-                  </a:lnTo>
-                  <a:lnTo>
-                    <a:pt x="716225" y="1482030"/>
-                  </a:lnTo>
-                  <a:lnTo>
-                    <a:pt x="787847" y="1538475"/>
-                  </a:lnTo>
-                  <a:lnTo>
-                    <a:pt x="859470" y="1593453"/>
-                  </a:lnTo>
-                  <a:lnTo>
-                    <a:pt x="931092" y="1647001"/>
-                  </a:lnTo>
-                  <a:lnTo>
-                    <a:pt x="1002715" y="1699156"/>
-                  </a:lnTo>
-                  <a:lnTo>
-                    <a:pt x="1074337" y="1749955"/>
-                  </a:lnTo>
-                  <a:lnTo>
-                    <a:pt x="1145960" y="1799433"/>
-                  </a:lnTo>
-                  <a:lnTo>
-                    <a:pt x="1217582" y="1847625"/>
-                  </a:lnTo>
-                  <a:lnTo>
-                    <a:pt x="1289205" y="1894563"/>
-                  </a:lnTo>
-                  <a:lnTo>
-                    <a:pt x="1360827" y="1940281"/>
-                  </a:lnTo>
-                  <a:lnTo>
-                    <a:pt x="1432450" y="1984809"/>
-                  </a:lnTo>
-                  <a:lnTo>
-                    <a:pt x="1504073" y="2028180"/>
-                  </a:lnTo>
-                  <a:lnTo>
-                    <a:pt x="1575695" y="2070423"/>
-                  </a:lnTo>
-                  <a:lnTo>
-                    <a:pt x="1647318" y="2111568"/>
-                  </a:lnTo>
-                  <a:lnTo>
-                    <a:pt x="1718940" y="2151643"/>
-                  </a:lnTo>
-                  <a:lnTo>
-                    <a:pt x="1790563" y="2190675"/>
-                  </a:lnTo>
-                  <a:lnTo>
-                    <a:pt x="1862185" y="2228693"/>
-                  </a:lnTo>
-                  <a:lnTo>
-                    <a:pt x="1933808" y="2265721"/>
-                  </a:lnTo>
-                  <a:lnTo>
-                    <a:pt x="2005430" y="2301787"/>
-                  </a:lnTo>
-                  <a:lnTo>
-                    <a:pt x="2077053" y="2336915"/>
-                  </a:lnTo>
-                  <a:lnTo>
-                    <a:pt x="2148675" y="2371130"/>
-                  </a:lnTo>
-                  <a:lnTo>
-                    <a:pt x="2220298" y="2404455"/>
-                  </a:lnTo>
-                  <a:lnTo>
-                    <a:pt x="2291920" y="2436913"/>
-                  </a:lnTo>
-                  <a:lnTo>
-                    <a:pt x="2363543" y="2468527"/>
-                  </a:lnTo>
-                  <a:lnTo>
-                    <a:pt x="2435165" y="2499320"/>
-                  </a:lnTo>
-                  <a:lnTo>
-                    <a:pt x="2506788" y="2529311"/>
-                  </a:lnTo>
-                  <a:lnTo>
-                    <a:pt x="2578410" y="2558522"/>
-                  </a:lnTo>
-                  <a:lnTo>
-                    <a:pt x="2650033" y="2586974"/>
-                  </a:lnTo>
-                  <a:lnTo>
-                    <a:pt x="2721655" y="2614686"/>
-                  </a:lnTo>
-                  <a:lnTo>
-                    <a:pt x="2793278" y="2641678"/>
-                  </a:lnTo>
-                  <a:lnTo>
-                    <a:pt x="2864901" y="2667967"/>
-                  </a:lnTo>
-                  <a:lnTo>
-                    <a:pt x="2936523" y="2693573"/>
-                  </a:lnTo>
-                  <a:lnTo>
-                    <a:pt x="3008146" y="2718513"/>
-                  </a:lnTo>
-                  <a:lnTo>
-                    <a:pt x="3079768" y="2742804"/>
-                  </a:lnTo>
-                  <a:lnTo>
-                    <a:pt x="3151391" y="2766464"/>
-                  </a:lnTo>
-                  <a:lnTo>
-                    <a:pt x="3223013" y="2768653"/>
-                  </a:lnTo>
-                  <a:lnTo>
-                    <a:pt x="3294636" y="2716839"/>
-                  </a:lnTo>
-                  <a:lnTo>
-                    <a:pt x="3366258" y="2661989"/>
-                  </a:lnTo>
-                  <a:lnTo>
-                    <a:pt x="3437881" y="2603924"/>
-                  </a:lnTo>
-                  <a:lnTo>
-                    <a:pt x="3509503" y="2542455"/>
-                  </a:lnTo>
-                  <a:lnTo>
-                    <a:pt x="3581126" y="2477383"/>
-                  </a:lnTo>
-                  <a:lnTo>
-                    <a:pt x="3652748" y="2408498"/>
-                  </a:lnTo>
-                  <a:lnTo>
-                    <a:pt x="3724371" y="2335574"/>
-                  </a:lnTo>
-                  <a:lnTo>
-                    <a:pt x="3795993" y="2258377"/>
-                  </a:lnTo>
-                  <a:lnTo>
-                    <a:pt x="3867616" y="2176655"/>
-                  </a:lnTo>
-                  <a:lnTo>
-                    <a:pt x="3939238" y="2090142"/>
-                  </a:lnTo>
-                  <a:lnTo>
-                    <a:pt x="4010861" y="1998559"/>
-                  </a:lnTo>
-                  <a:lnTo>
-                    <a:pt x="4082483" y="1901608"/>
-                  </a:lnTo>
-                  <a:lnTo>
-                    <a:pt x="4154106" y="1798975"/>
-                  </a:lnTo>
-                  <a:lnTo>
-                    <a:pt x="4225729" y="1690325"/>
-                  </a:lnTo>
-                  <a:lnTo>
-                    <a:pt x="4297351" y="1575308"/>
-                  </a:lnTo>
-                  <a:lnTo>
-                    <a:pt x="4368974" y="1453549"/>
-                  </a:lnTo>
-                  <a:lnTo>
-                    <a:pt x="4440596" y="1324653"/>
-                  </a:lnTo>
-                  <a:lnTo>
-                    <a:pt x="4512219" y="1188202"/>
-                  </a:lnTo>
-                  <a:lnTo>
-                    <a:pt x="4583841" y="1043753"/>
-                  </a:lnTo>
-                  <a:lnTo>
-                    <a:pt x="4655464" y="890838"/>
-                  </a:lnTo>
-                  <a:lnTo>
-                    <a:pt x="4727086" y="728960"/>
-                  </a:lnTo>
-                  <a:lnTo>
-                    <a:pt x="4798709" y="557594"/>
-                  </a:lnTo>
-                  <a:lnTo>
-                    <a:pt x="4870331" y="376183"/>
-                  </a:lnTo>
-                  <a:lnTo>
-                    <a:pt x="4941954" y="184140"/>
-                  </a:lnTo>
-                  <a:lnTo>
-                    <a:pt x="5006826" y="0"/>
+                    <a:pt x="71622" y="938584"/>
+                  </a:lnTo>
+                  <a:lnTo>
+                    <a:pt x="143245" y="1009234"/>
+                  </a:lnTo>
+                  <a:lnTo>
+                    <a:pt x="214867" y="1078045"/>
+                  </a:lnTo>
+                  <a:lnTo>
+                    <a:pt x="286490" y="1145065"/>
+                  </a:lnTo>
+                  <a:lnTo>
+                    <a:pt x="358112" y="1210341"/>
+                  </a:lnTo>
+                  <a:lnTo>
+                    <a:pt x="429735" y="1273917"/>
+                  </a:lnTo>
+                  <a:lnTo>
+                    <a:pt x="501357" y="1335838"/>
+                  </a:lnTo>
+                  <a:lnTo>
+                    <a:pt x="572980" y="1396147"/>
+                  </a:lnTo>
+                  <a:lnTo>
+                    <a:pt x="644602" y="1454887"/>
+                  </a:lnTo>
+                  <a:lnTo>
+                    <a:pt x="716225" y="1512097"/>
+                  </a:lnTo>
+                  <a:lnTo>
+                    <a:pt x="787847" y="1567818"/>
+                  </a:lnTo>
+                  <a:lnTo>
+                    <a:pt x="859470" y="1622088"/>
+                  </a:lnTo>
+                  <a:lnTo>
+                    <a:pt x="931092" y="1674946"/>
+                  </a:lnTo>
+                  <a:lnTo>
+                    <a:pt x="1002715" y="1726428"/>
+                  </a:lnTo>
+                  <a:lnTo>
+                    <a:pt x="1074337" y="1776570"/>
+                  </a:lnTo>
+                  <a:lnTo>
+                    <a:pt x="1145960" y="1825406"/>
+                  </a:lnTo>
+                  <a:lnTo>
+                    <a:pt x="1217582" y="1872971"/>
+                  </a:lnTo>
+                  <a:lnTo>
+                    <a:pt x="1289205" y="1919298"/>
+                  </a:lnTo>
+                  <a:lnTo>
+                    <a:pt x="1360827" y="1964420"/>
+                  </a:lnTo>
+                  <a:lnTo>
+                    <a:pt x="1432450" y="2008366"/>
+                  </a:lnTo>
+                  <a:lnTo>
+                    <a:pt x="1504073" y="2051169"/>
+                  </a:lnTo>
+                  <a:lnTo>
+                    <a:pt x="1575695" y="2092857"/>
+                  </a:lnTo>
+                  <a:lnTo>
+                    <a:pt x="1647318" y="2133460"/>
+                  </a:lnTo>
+                  <a:lnTo>
+                    <a:pt x="1718940" y="2173006"/>
+                  </a:lnTo>
+                  <a:lnTo>
+                    <a:pt x="1790563" y="2211523"/>
+                  </a:lnTo>
+                  <a:lnTo>
+                    <a:pt x="1862185" y="2249037"/>
+                  </a:lnTo>
+                  <a:lnTo>
+                    <a:pt x="1933808" y="2285575"/>
+                  </a:lnTo>
+                  <a:lnTo>
+                    <a:pt x="2005430" y="2321161"/>
+                  </a:lnTo>
+                  <a:lnTo>
+                    <a:pt x="2077053" y="2355821"/>
+                  </a:lnTo>
+                  <a:lnTo>
+                    <a:pt x="2148675" y="2389579"/>
+                  </a:lnTo>
+                  <a:lnTo>
+                    <a:pt x="2220298" y="2422458"/>
+                  </a:lnTo>
+                  <a:lnTo>
+                    <a:pt x="2291920" y="2454481"/>
+                  </a:lnTo>
+                  <a:lnTo>
+                    <a:pt x="2363543" y="2485671"/>
+                  </a:lnTo>
+                  <a:lnTo>
+                    <a:pt x="2435165" y="2516049"/>
+                  </a:lnTo>
+                  <a:lnTo>
+                    <a:pt x="2506788" y="2545636"/>
+                  </a:lnTo>
+                  <a:lnTo>
+                    <a:pt x="2578410" y="2574452"/>
+                  </a:lnTo>
+                  <a:lnTo>
+                    <a:pt x="2650033" y="2602519"/>
+                  </a:lnTo>
+                  <a:lnTo>
+                    <a:pt x="2721655" y="2629855"/>
+                  </a:lnTo>
+                  <a:lnTo>
+                    <a:pt x="2793278" y="2656479"/>
+                  </a:lnTo>
+                  <a:lnTo>
+                    <a:pt x="2864901" y="2682411"/>
+                  </a:lnTo>
+                  <a:lnTo>
+                    <a:pt x="2936523" y="2707667"/>
+                  </a:lnTo>
+                  <a:lnTo>
+                    <a:pt x="3008146" y="2732266"/>
+                  </a:lnTo>
+                  <a:lnTo>
+                    <a:pt x="3079768" y="2756225"/>
+                  </a:lnTo>
+                  <a:lnTo>
+                    <a:pt x="3151391" y="2779559"/>
+                  </a:lnTo>
+                  <a:lnTo>
+                    <a:pt x="3223013" y="2739686"/>
+                  </a:lnTo>
+                  <a:lnTo>
+                    <a:pt x="3294636" y="2686117"/>
+                  </a:lnTo>
+                  <a:lnTo>
+                    <a:pt x="3366258" y="2629405"/>
+                  </a:lnTo>
+                  <a:lnTo>
+                    <a:pt x="3437881" y="2569365"/>
+                  </a:lnTo>
+                  <a:lnTo>
+                    <a:pt x="3509503" y="2505802"/>
+                  </a:lnTo>
+                  <a:lnTo>
+                    <a:pt x="3581126" y="2438510"/>
+                  </a:lnTo>
+                  <a:lnTo>
+                    <a:pt x="3652748" y="2367269"/>
+                  </a:lnTo>
+                  <a:lnTo>
+                    <a:pt x="3724371" y="2291848"/>
+                  </a:lnTo>
+                  <a:lnTo>
+                    <a:pt x="3795993" y="2212002"/>
+                  </a:lnTo>
+                  <a:lnTo>
+                    <a:pt x="3867616" y="2127471"/>
+                  </a:lnTo>
+                  <a:lnTo>
+                    <a:pt x="3939238" y="2037979"/>
+                  </a:lnTo>
+                  <a:lnTo>
+                    <a:pt x="4010861" y="1943237"/>
+                  </a:lnTo>
+                  <a:lnTo>
+                    <a:pt x="4082483" y="1842935"/>
+                  </a:lnTo>
+                  <a:lnTo>
+                    <a:pt x="4154106" y="1736748"/>
+                  </a:lnTo>
+                  <a:lnTo>
+                    <a:pt x="4225729" y="1624331"/>
+                  </a:lnTo>
+                  <a:lnTo>
+                    <a:pt x="4297351" y="1505317"/>
+                  </a:lnTo>
+                  <a:lnTo>
+                    <a:pt x="4368974" y="1379320"/>
+                  </a:lnTo>
+                  <a:lnTo>
+                    <a:pt x="4440596" y="1245930"/>
+                  </a:lnTo>
+                  <a:lnTo>
+                    <a:pt x="4512219" y="1104713"/>
+                  </a:lnTo>
+                  <a:lnTo>
+                    <a:pt x="4583841" y="955210"/>
+                  </a:lnTo>
+                  <a:lnTo>
+                    <a:pt x="4655464" y="796935"/>
+                  </a:lnTo>
+                  <a:lnTo>
+                    <a:pt x="4727086" y="629373"/>
+                  </a:lnTo>
+                  <a:lnTo>
+                    <a:pt x="4798709" y="451979"/>
+                  </a:lnTo>
+                  <a:lnTo>
+                    <a:pt x="4870331" y="264176"/>
+                  </a:lnTo>
+                  <a:lnTo>
+                    <a:pt x="4941954" y="65353"/>
+                  </a:lnTo>
+                  <a:lnTo>
+                    <a:pt x="4964192" y="0"/>
                   </a:lnTo>
                 </a:path>
               </a:pathLst>
@@ -3744,312 +3744,312 @@
           </p:nvSpPr>
           <p:spPr>
             <a:xfrm>
-              <a:off x="1172049" y="4686072"/>
-              <a:ext cx="7090630" cy="795015"/>
+              <a:off x="1172049" y="4686849"/>
+              <a:ext cx="7090630" cy="792194"/>
             </a:xfrm>
             <a:custGeom>
               <a:avLst/>
               <a:pathLst>
-                <a:path w="7090630" h="795015">
+                <a:path w="7090630" h="792194">
                   <a:moveTo>
-                    <a:pt x="7090630" y="655089"/>
+                    <a:pt x="7090630" y="657697"/>
                   </a:moveTo>
                   <a:lnTo>
-                    <a:pt x="7019007" y="649534"/>
-                  </a:lnTo>
-                  <a:lnTo>
-                    <a:pt x="6947385" y="643831"/>
-                  </a:lnTo>
-                  <a:lnTo>
-                    <a:pt x="6875762" y="637976"/>
-                  </a:lnTo>
-                  <a:lnTo>
-                    <a:pt x="6804139" y="631965"/>
-                  </a:lnTo>
-                  <a:lnTo>
-                    <a:pt x="6732517" y="625793"/>
-                  </a:lnTo>
-                  <a:lnTo>
-                    <a:pt x="6660894" y="619456"/>
-                  </a:lnTo>
-                  <a:lnTo>
-                    <a:pt x="6589272" y="612950"/>
-                  </a:lnTo>
-                  <a:lnTo>
-                    <a:pt x="6517649" y="606271"/>
-                  </a:lnTo>
-                  <a:lnTo>
-                    <a:pt x="6446027" y="599413"/>
-                  </a:lnTo>
-                  <a:lnTo>
-                    <a:pt x="6374404" y="592372"/>
-                  </a:lnTo>
-                  <a:lnTo>
-                    <a:pt x="6302782" y="585143"/>
-                  </a:lnTo>
-                  <a:lnTo>
-                    <a:pt x="6231159" y="577721"/>
-                  </a:lnTo>
-                  <a:lnTo>
-                    <a:pt x="6159537" y="570101"/>
-                  </a:lnTo>
-                  <a:lnTo>
-                    <a:pt x="6087914" y="562277"/>
-                  </a:lnTo>
-                  <a:lnTo>
-                    <a:pt x="6016292" y="554245"/>
-                  </a:lnTo>
-                  <a:lnTo>
-                    <a:pt x="5944669" y="545998"/>
-                  </a:lnTo>
-                  <a:lnTo>
-                    <a:pt x="5873047" y="537531"/>
-                  </a:lnTo>
-                  <a:lnTo>
-                    <a:pt x="5801424" y="528838"/>
-                  </a:lnTo>
-                  <a:lnTo>
-                    <a:pt x="5729802" y="519913"/>
-                  </a:lnTo>
-                  <a:lnTo>
-                    <a:pt x="5658179" y="510749"/>
-                  </a:lnTo>
-                  <a:lnTo>
-                    <a:pt x="5586557" y="501341"/>
-                  </a:lnTo>
-                  <a:lnTo>
-                    <a:pt x="5514934" y="491681"/>
-                  </a:lnTo>
-                  <a:lnTo>
-                    <a:pt x="5443311" y="481764"/>
-                  </a:lnTo>
-                  <a:lnTo>
-                    <a:pt x="5371689" y="471582"/>
-                  </a:lnTo>
-                  <a:lnTo>
-                    <a:pt x="5300066" y="461128"/>
-                  </a:lnTo>
-                  <a:lnTo>
-                    <a:pt x="5228444" y="450395"/>
-                  </a:lnTo>
-                  <a:lnTo>
-                    <a:pt x="5156821" y="439376"/>
-                  </a:lnTo>
-                  <a:lnTo>
-                    <a:pt x="5085199" y="428062"/>
-                  </a:lnTo>
-                  <a:lnTo>
-                    <a:pt x="5013576" y="416446"/>
-                  </a:lnTo>
-                  <a:lnTo>
-                    <a:pt x="4941954" y="404520"/>
-                  </a:lnTo>
-                  <a:lnTo>
-                    <a:pt x="4870331" y="392276"/>
-                  </a:lnTo>
-                  <a:lnTo>
-                    <a:pt x="4798709" y="379705"/>
-                  </a:lnTo>
-                  <a:lnTo>
-                    <a:pt x="4727086" y="366798"/>
-                  </a:lnTo>
-                  <a:lnTo>
-                    <a:pt x="4655464" y="353546"/>
-                  </a:lnTo>
-                  <a:lnTo>
-                    <a:pt x="4583841" y="339941"/>
-                  </a:lnTo>
-                  <a:lnTo>
-                    <a:pt x="4512219" y="325972"/>
-                  </a:lnTo>
-                  <a:lnTo>
-                    <a:pt x="4440596" y="311631"/>
-                  </a:lnTo>
-                  <a:lnTo>
-                    <a:pt x="4368974" y="296907"/>
-                  </a:lnTo>
-                  <a:lnTo>
-                    <a:pt x="4297351" y="281789"/>
-                  </a:lnTo>
-                  <a:lnTo>
-                    <a:pt x="4225729" y="266268"/>
-                  </a:lnTo>
-                  <a:lnTo>
-                    <a:pt x="4154106" y="250332"/>
-                  </a:lnTo>
-                  <a:lnTo>
-                    <a:pt x="4082483" y="233972"/>
-                  </a:lnTo>
-                  <a:lnTo>
-                    <a:pt x="4010861" y="217174"/>
-                  </a:lnTo>
-                  <a:lnTo>
-                    <a:pt x="3939238" y="199928"/>
-                  </a:lnTo>
-                  <a:lnTo>
-                    <a:pt x="3867616" y="182221"/>
-                  </a:lnTo>
-                  <a:lnTo>
-                    <a:pt x="3795993" y="164041"/>
-                  </a:lnTo>
-                  <a:lnTo>
-                    <a:pt x="3724371" y="145377"/>
-                  </a:lnTo>
-                  <a:lnTo>
-                    <a:pt x="3652748" y="126213"/>
-                  </a:lnTo>
-                  <a:lnTo>
-                    <a:pt x="3581126" y="106539"/>
-                  </a:lnTo>
-                  <a:lnTo>
-                    <a:pt x="3509503" y="86339"/>
-                  </a:lnTo>
-                  <a:lnTo>
-                    <a:pt x="3437881" y="65599"/>
-                  </a:lnTo>
-                  <a:lnTo>
-                    <a:pt x="3366258" y="44306"/>
-                  </a:lnTo>
-                  <a:lnTo>
-                    <a:pt x="3294636" y="22445"/>
-                  </a:lnTo>
-                  <a:lnTo>
-                    <a:pt x="3223013" y="0"/>
-                  </a:lnTo>
-                  <a:lnTo>
-                    <a:pt x="3151391" y="28088"/>
-                  </a:lnTo>
-                  <a:lnTo>
-                    <a:pt x="3079768" y="74323"/>
-                  </a:lnTo>
-                  <a:lnTo>
-                    <a:pt x="3008146" y="117998"/>
-                  </a:lnTo>
-                  <a:lnTo>
-                    <a:pt x="2936523" y="159254"/>
-                  </a:lnTo>
-                  <a:lnTo>
-                    <a:pt x="2864901" y="198227"/>
-                  </a:lnTo>
-                  <a:lnTo>
-                    <a:pt x="2793278" y="235041"/>
-                  </a:lnTo>
-                  <a:lnTo>
-                    <a:pt x="2721655" y="269817"/>
-                  </a:lnTo>
-                  <a:lnTo>
-                    <a:pt x="2650033" y="302668"/>
-                  </a:lnTo>
-                  <a:lnTo>
-                    <a:pt x="2578410" y="333700"/>
-                  </a:lnTo>
-                  <a:lnTo>
-                    <a:pt x="2506788" y="363013"/>
-                  </a:lnTo>
-                  <a:lnTo>
-                    <a:pt x="2435165" y="390704"/>
-                  </a:lnTo>
-                  <a:lnTo>
-                    <a:pt x="2363543" y="416861"/>
-                  </a:lnTo>
-                  <a:lnTo>
-                    <a:pt x="2291920" y="441571"/>
-                  </a:lnTo>
-                  <a:lnTo>
-                    <a:pt x="2220298" y="464912"/>
-                  </a:lnTo>
-                  <a:lnTo>
-                    <a:pt x="2148675" y="486960"/>
-                  </a:lnTo>
-                  <a:lnTo>
-                    <a:pt x="2077053" y="507788"/>
-                  </a:lnTo>
-                  <a:lnTo>
-                    <a:pt x="2005430" y="527463"/>
-                  </a:lnTo>
-                  <a:lnTo>
-                    <a:pt x="1933808" y="546048"/>
-                  </a:lnTo>
-                  <a:lnTo>
-                    <a:pt x="1862185" y="563605"/>
-                  </a:lnTo>
-                  <a:lnTo>
-                    <a:pt x="1790563" y="580189"/>
-                  </a:lnTo>
-                  <a:lnTo>
-                    <a:pt x="1718940" y="595855"/>
-                  </a:lnTo>
-                  <a:lnTo>
-                    <a:pt x="1647318" y="610654"/>
-                  </a:lnTo>
-                  <a:lnTo>
-                    <a:pt x="1575695" y="624633"/>
-                  </a:lnTo>
-                  <a:lnTo>
-                    <a:pt x="1504073" y="637838"/>
-                  </a:lnTo>
-                  <a:lnTo>
-                    <a:pt x="1432450" y="650313"/>
-                  </a:lnTo>
-                  <a:lnTo>
-                    <a:pt x="1360827" y="662096"/>
-                  </a:lnTo>
-                  <a:lnTo>
-                    <a:pt x="1289205" y="673227"/>
-                  </a:lnTo>
-                  <a:lnTo>
-                    <a:pt x="1217582" y="683742"/>
-                  </a:lnTo>
-                  <a:lnTo>
-                    <a:pt x="1145960" y="693674"/>
-                  </a:lnTo>
-                  <a:lnTo>
-                    <a:pt x="1074337" y="703057"/>
-                  </a:lnTo>
-                  <a:lnTo>
-                    <a:pt x="1002715" y="711920"/>
-                  </a:lnTo>
-                  <a:lnTo>
-                    <a:pt x="931092" y="720293"/>
-                  </a:lnTo>
-                  <a:lnTo>
-                    <a:pt x="859470" y="728201"/>
-                  </a:lnTo>
-                  <a:lnTo>
-                    <a:pt x="787847" y="735672"/>
-                  </a:lnTo>
-                  <a:lnTo>
-                    <a:pt x="716225" y="742730"/>
-                  </a:lnTo>
-                  <a:lnTo>
-                    <a:pt x="644602" y="749396"/>
-                  </a:lnTo>
-                  <a:lnTo>
-                    <a:pt x="572980" y="755694"/>
-                  </a:lnTo>
-                  <a:lnTo>
-                    <a:pt x="501357" y="761642"/>
-                  </a:lnTo>
-                  <a:lnTo>
-                    <a:pt x="429735" y="767262"/>
-                  </a:lnTo>
-                  <a:lnTo>
-                    <a:pt x="358112" y="772570"/>
-                  </a:lnTo>
-                  <a:lnTo>
-                    <a:pt x="286490" y="777584"/>
-                  </a:lnTo>
-                  <a:lnTo>
-                    <a:pt x="214867" y="782321"/>
-                  </a:lnTo>
-                  <a:lnTo>
-                    <a:pt x="143245" y="786795"/>
-                  </a:lnTo>
-                  <a:lnTo>
-                    <a:pt x="71622" y="791022"/>
-                  </a:lnTo>
-                  <a:lnTo>
-                    <a:pt x="0" y="795015"/>
+                    <a:pt x="7019007" y="652227"/>
+                  </a:lnTo>
+                  <a:lnTo>
+                    <a:pt x="6947385" y="646611"/>
+                  </a:lnTo>
+                  <a:lnTo>
+                    <a:pt x="6875762" y="640845"/>
+                  </a:lnTo>
+                  <a:lnTo>
+                    <a:pt x="6804139" y="634924"/>
+                  </a:lnTo>
+                  <a:lnTo>
+                    <a:pt x="6732517" y="628846"/>
+                  </a:lnTo>
+                  <a:lnTo>
+                    <a:pt x="6660894" y="622605"/>
+                  </a:lnTo>
+                  <a:lnTo>
+                    <a:pt x="6589272" y="616197"/>
+                  </a:lnTo>
+                  <a:lnTo>
+                    <a:pt x="6517649" y="609618"/>
+                  </a:lnTo>
+                  <a:lnTo>
+                    <a:pt x="6446027" y="602863"/>
+                  </a:lnTo>
+                  <a:lnTo>
+                    <a:pt x="6374404" y="595927"/>
+                  </a:lnTo>
+                  <a:lnTo>
+                    <a:pt x="6302782" y="588807"/>
+                  </a:lnTo>
+                  <a:lnTo>
+                    <a:pt x="6231159" y="581495"/>
+                  </a:lnTo>
+                  <a:lnTo>
+                    <a:pt x="6159537" y="573989"/>
+                  </a:lnTo>
+                  <a:lnTo>
+                    <a:pt x="6087914" y="566282"/>
+                  </a:lnTo>
+                  <a:lnTo>
+                    <a:pt x="6016292" y="558368"/>
+                  </a:lnTo>
+                  <a:lnTo>
+                    <a:pt x="5944669" y="550244"/>
+                  </a:lnTo>
+                  <a:lnTo>
+                    <a:pt x="5873047" y="541902"/>
+                  </a:lnTo>
+                  <a:lnTo>
+                    <a:pt x="5801424" y="533337"/>
+                  </a:lnTo>
+                  <a:lnTo>
+                    <a:pt x="5729802" y="524543"/>
+                  </a:lnTo>
+                  <a:lnTo>
+                    <a:pt x="5658179" y="515515"/>
+                  </a:lnTo>
+                  <a:lnTo>
+                    <a:pt x="5586557" y="506245"/>
+                  </a:lnTo>
+                  <a:lnTo>
+                    <a:pt x="5514934" y="496727"/>
+                  </a:lnTo>
+                  <a:lnTo>
+                    <a:pt x="5443311" y="486955"/>
+                  </a:lnTo>
+                  <a:lnTo>
+                    <a:pt x="5371689" y="476921"/>
+                  </a:lnTo>
+                  <a:lnTo>
+                    <a:pt x="5300066" y="466620"/>
+                  </a:lnTo>
+                  <a:lnTo>
+                    <a:pt x="5228444" y="456043"/>
+                  </a:lnTo>
+                  <a:lnTo>
+                    <a:pt x="5156821" y="445183"/>
+                  </a:lnTo>
+                  <a:lnTo>
+                    <a:pt x="5085199" y="434034"/>
+                  </a:lnTo>
+                  <a:lnTo>
+                    <a:pt x="5013576" y="422586"/>
+                  </a:lnTo>
+                  <a:lnTo>
+                    <a:pt x="4941954" y="410832"/>
+                  </a:lnTo>
+                  <a:lnTo>
+                    <a:pt x="4870331" y="398764"/>
+                  </a:lnTo>
+                  <a:lnTo>
+                    <a:pt x="4798709" y="386374"/>
+                  </a:lnTo>
+                  <a:lnTo>
+                    <a:pt x="4727086" y="373652"/>
+                  </a:lnTo>
+                  <a:lnTo>
+                    <a:pt x="4655464" y="360591"/>
+                  </a:lnTo>
+                  <a:lnTo>
+                    <a:pt x="4583841" y="347180"/>
+                  </a:lnTo>
+                  <a:lnTo>
+                    <a:pt x="4512219" y="333411"/>
+                  </a:lnTo>
+                  <a:lnTo>
+                    <a:pt x="4440596" y="319274"/>
+                  </a:lnTo>
+                  <a:lnTo>
+                    <a:pt x="4368974" y="304759"/>
+                  </a:lnTo>
+                  <a:lnTo>
+                    <a:pt x="4297351" y="289856"/>
+                  </a:lnTo>
+                  <a:lnTo>
+                    <a:pt x="4225729" y="274554"/>
+                  </a:lnTo>
+                  <a:lnTo>
+                    <a:pt x="4154106" y="258844"/>
+                  </a:lnTo>
+                  <a:lnTo>
+                    <a:pt x="4082483" y="242714"/>
+                  </a:lnTo>
+                  <a:lnTo>
+                    <a:pt x="4010861" y="226153"/>
+                  </a:lnTo>
+                  <a:lnTo>
+                    <a:pt x="3939238" y="209149"/>
+                  </a:lnTo>
+                  <a:lnTo>
+                    <a:pt x="3867616" y="191691"/>
+                  </a:lnTo>
+                  <a:lnTo>
+                    <a:pt x="3795993" y="173766"/>
+                  </a:lnTo>
+                  <a:lnTo>
+                    <a:pt x="3724371" y="155362"/>
+                  </a:lnTo>
+                  <a:lnTo>
+                    <a:pt x="3652748" y="136466"/>
+                  </a:lnTo>
+                  <a:lnTo>
+                    <a:pt x="3581126" y="117066"/>
+                  </a:lnTo>
+                  <a:lnTo>
+                    <a:pt x="3509503" y="97146"/>
+                  </a:lnTo>
+                  <a:lnTo>
+                    <a:pt x="3437881" y="76694"/>
+                  </a:lnTo>
+                  <a:lnTo>
+                    <a:pt x="3366258" y="55696"/>
+                  </a:lnTo>
+                  <a:lnTo>
+                    <a:pt x="3294636" y="34137"/>
+                  </a:lnTo>
+                  <a:lnTo>
+                    <a:pt x="3223013" y="12001"/>
+                  </a:lnTo>
+                  <a:lnTo>
+                    <a:pt x="3151391" y="0"/>
+                  </a:lnTo>
+                  <a:lnTo>
+                    <a:pt x="3079768" y="47795"/>
+                  </a:lnTo>
+                  <a:lnTo>
+                    <a:pt x="3008146" y="92941"/>
+                  </a:lnTo>
+                  <a:lnTo>
+                    <a:pt x="2936523" y="135586"/>
+                  </a:lnTo>
+                  <a:lnTo>
+                    <a:pt x="2864901" y="175866"/>
+                  </a:lnTo>
+                  <a:lnTo>
+                    <a:pt x="2793278" y="213914"/>
+                  </a:lnTo>
+                  <a:lnTo>
+                    <a:pt x="2721655" y="249854"/>
+                  </a:lnTo>
+                  <a:lnTo>
+                    <a:pt x="2650033" y="283801"/>
+                  </a:lnTo>
+                  <a:lnTo>
+                    <a:pt x="2578410" y="315867"/>
+                  </a:lnTo>
+                  <a:lnTo>
+                    <a:pt x="2506788" y="346156"/>
+                  </a:lnTo>
+                  <a:lnTo>
+                    <a:pt x="2435165" y="374766"/>
+                  </a:lnTo>
+                  <a:lnTo>
+                    <a:pt x="2363543" y="401790"/>
+                  </a:lnTo>
+                  <a:lnTo>
+                    <a:pt x="2291920" y="427317"/>
+                  </a:lnTo>
+                  <a:lnTo>
+                    <a:pt x="2220298" y="451429"/>
+                  </a:lnTo>
+                  <a:lnTo>
+                    <a:pt x="2148675" y="474204"/>
+                  </a:lnTo>
+                  <a:lnTo>
+                    <a:pt x="2077053" y="495717"/>
+                  </a:lnTo>
+                  <a:lnTo>
+                    <a:pt x="2005430" y="516038"/>
+                  </a:lnTo>
+                  <a:lnTo>
+                    <a:pt x="1933808" y="535232"/>
+                  </a:lnTo>
+                  <a:lnTo>
+                    <a:pt x="1862185" y="553363"/>
+                  </a:lnTo>
+                  <a:lnTo>
+                    <a:pt x="1790563" y="570489"/>
+                  </a:lnTo>
+                  <a:lnTo>
+                    <a:pt x="1718940" y="586665"/>
+                  </a:lnTo>
+                  <a:lnTo>
+                    <a:pt x="1647318" y="601945"/>
+                  </a:lnTo>
+                  <a:lnTo>
+                    <a:pt x="1575695" y="616378"/>
+                  </a:lnTo>
+                  <a:lnTo>
+                    <a:pt x="1504073" y="630011"/>
+                  </a:lnTo>
+                  <a:lnTo>
+                    <a:pt x="1432450" y="642889"/>
+                  </a:lnTo>
+                  <a:lnTo>
+                    <a:pt x="1360827" y="655053"/>
+                  </a:lnTo>
+                  <a:lnTo>
+                    <a:pt x="1289205" y="666543"/>
+                  </a:lnTo>
+                  <a:lnTo>
+                    <a:pt x="1217582" y="677395"/>
+                  </a:lnTo>
+                  <a:lnTo>
+                    <a:pt x="1145960" y="687647"/>
+                  </a:lnTo>
+                  <a:lnTo>
+                    <a:pt x="1074337" y="697330"/>
+                  </a:lnTo>
+                  <a:lnTo>
+                    <a:pt x="1002715" y="706476"/>
+                  </a:lnTo>
+                  <a:lnTo>
+                    <a:pt x="931092" y="715116"/>
+                  </a:lnTo>
+                  <a:lnTo>
+                    <a:pt x="859470" y="723277"/>
+                  </a:lnTo>
+                  <a:lnTo>
+                    <a:pt x="787847" y="730985"/>
+                  </a:lnTo>
+                  <a:lnTo>
+                    <a:pt x="716225" y="738266"/>
+                  </a:lnTo>
+                  <a:lnTo>
+                    <a:pt x="644602" y="745144"/>
+                  </a:lnTo>
+                  <a:lnTo>
+                    <a:pt x="572980" y="751640"/>
+                  </a:lnTo>
+                  <a:lnTo>
+                    <a:pt x="501357" y="757777"/>
+                  </a:lnTo>
+                  <a:lnTo>
+                    <a:pt x="429735" y="763573"/>
+                  </a:lnTo>
+                  <a:lnTo>
+                    <a:pt x="358112" y="769048"/>
+                  </a:lnTo>
+                  <a:lnTo>
+                    <a:pt x="286490" y="774220"/>
+                  </a:lnTo>
+                  <a:lnTo>
+                    <a:pt x="214867" y="779105"/>
+                  </a:lnTo>
+                  <a:lnTo>
+                    <a:pt x="143245" y="783719"/>
+                  </a:lnTo>
+                  <a:lnTo>
+                    <a:pt x="71622" y="788077"/>
+                  </a:lnTo>
+                  <a:lnTo>
+                    <a:pt x="0" y="792194"/>
                   </a:lnTo>
                 </a:path>
               </a:pathLst>
@@ -4069,309 +4069,309 @@
           </p:nvSpPr>
           <p:spPr>
             <a:xfrm>
-              <a:off x="1172049" y="3552983"/>
-              <a:ext cx="7090630" cy="1557550"/>
+              <a:off x="1172049" y="3533872"/>
+              <a:ext cx="7090630" cy="1573162"/>
             </a:xfrm>
             <a:custGeom>
               <a:avLst/>
               <a:pathLst>
-                <a:path w="7090630" h="1557550">
+                <a:path w="7090630" h="1573162">
                   <a:moveTo>
-                    <a:pt x="0" y="1557550"/>
+                    <a:pt x="0" y="1573162"/>
                   </a:moveTo>
                   <a:lnTo>
-                    <a:pt x="71622" y="1550784"/>
-                  </a:lnTo>
-                  <a:lnTo>
-                    <a:pt x="143245" y="1543914"/>
-                  </a:lnTo>
-                  <a:lnTo>
-                    <a:pt x="214867" y="1536938"/>
-                  </a:lnTo>
-                  <a:lnTo>
-                    <a:pt x="286490" y="1529854"/>
-                  </a:lnTo>
-                  <a:lnTo>
-                    <a:pt x="358112" y="1522661"/>
-                  </a:lnTo>
-                  <a:lnTo>
-                    <a:pt x="429735" y="1515357"/>
-                  </a:lnTo>
-                  <a:lnTo>
-                    <a:pt x="501357" y="1507941"/>
-                  </a:lnTo>
-                  <a:lnTo>
-                    <a:pt x="572980" y="1500410"/>
-                  </a:lnTo>
-                  <a:lnTo>
-                    <a:pt x="644602" y="1492763"/>
-                  </a:lnTo>
-                  <a:lnTo>
-                    <a:pt x="716225" y="1484998"/>
-                  </a:lnTo>
-                  <a:lnTo>
-                    <a:pt x="787847" y="1477113"/>
-                  </a:lnTo>
-                  <a:lnTo>
-                    <a:pt x="859470" y="1469106"/>
-                  </a:lnTo>
-                  <a:lnTo>
-                    <a:pt x="931092" y="1460976"/>
-                  </a:lnTo>
-                  <a:lnTo>
-                    <a:pt x="1002715" y="1452721"/>
-                  </a:lnTo>
-                  <a:lnTo>
-                    <a:pt x="1074337" y="1444339"/>
-                  </a:lnTo>
-                  <a:lnTo>
-                    <a:pt x="1145960" y="1435827"/>
-                  </a:lnTo>
-                  <a:lnTo>
-                    <a:pt x="1217582" y="1427183"/>
-                  </a:lnTo>
-                  <a:lnTo>
-                    <a:pt x="1289205" y="1418407"/>
-                  </a:lnTo>
-                  <a:lnTo>
-                    <a:pt x="1360827" y="1409495"/>
-                  </a:lnTo>
-                  <a:lnTo>
-                    <a:pt x="1432450" y="1400446"/>
-                  </a:lnTo>
-                  <a:lnTo>
-                    <a:pt x="1504073" y="1391257"/>
-                  </a:lnTo>
-                  <a:lnTo>
-                    <a:pt x="1575695" y="1381926"/>
-                  </a:lnTo>
-                  <a:lnTo>
-                    <a:pt x="1647318" y="1372452"/>
-                  </a:lnTo>
-                  <a:lnTo>
-                    <a:pt x="1718940" y="1362831"/>
-                  </a:lnTo>
-                  <a:lnTo>
-                    <a:pt x="1790563" y="1353062"/>
-                  </a:lnTo>
-                  <a:lnTo>
-                    <a:pt x="1862185" y="1343142"/>
-                  </a:lnTo>
-                  <a:lnTo>
-                    <a:pt x="1933808" y="1333070"/>
-                  </a:lnTo>
-                  <a:lnTo>
-                    <a:pt x="2005430" y="1322841"/>
-                  </a:lnTo>
-                  <a:lnTo>
-                    <a:pt x="2077053" y="1312456"/>
-                  </a:lnTo>
-                  <a:lnTo>
-                    <a:pt x="2148675" y="1301910"/>
-                  </a:lnTo>
-                  <a:lnTo>
-                    <a:pt x="2220298" y="1291201"/>
-                  </a:lnTo>
-                  <a:lnTo>
-                    <a:pt x="2291920" y="1280327"/>
-                  </a:lnTo>
-                  <a:lnTo>
-                    <a:pt x="2363543" y="1269286"/>
-                  </a:lnTo>
-                  <a:lnTo>
-                    <a:pt x="2435165" y="1258074"/>
-                  </a:lnTo>
-                  <a:lnTo>
-                    <a:pt x="2506788" y="1246689"/>
-                  </a:lnTo>
-                  <a:lnTo>
-                    <a:pt x="2578410" y="1235129"/>
-                  </a:lnTo>
-                  <a:lnTo>
-                    <a:pt x="2650033" y="1223390"/>
-                  </a:lnTo>
-                  <a:lnTo>
-                    <a:pt x="2721655" y="1211470"/>
-                  </a:lnTo>
-                  <a:lnTo>
-                    <a:pt x="2793278" y="1199367"/>
-                  </a:lnTo>
-                  <a:lnTo>
-                    <a:pt x="2864901" y="1187077"/>
-                  </a:lnTo>
-                  <a:lnTo>
-                    <a:pt x="2936523" y="1174597"/>
-                  </a:lnTo>
-                  <a:lnTo>
-                    <a:pt x="3008146" y="1161925"/>
-                  </a:lnTo>
-                  <a:lnTo>
-                    <a:pt x="3079768" y="1149057"/>
-                  </a:lnTo>
-                  <a:lnTo>
-                    <a:pt x="3151391" y="1135991"/>
-                  </a:lnTo>
-                  <a:lnTo>
-                    <a:pt x="3223013" y="1122723"/>
-                  </a:lnTo>
-                  <a:lnTo>
-                    <a:pt x="3294636" y="1109251"/>
-                  </a:lnTo>
-                  <a:lnTo>
-                    <a:pt x="3366258" y="1095571"/>
-                  </a:lnTo>
-                  <a:lnTo>
-                    <a:pt x="3437881" y="1081680"/>
-                  </a:lnTo>
-                  <a:lnTo>
-                    <a:pt x="3509503" y="1067574"/>
-                  </a:lnTo>
-                  <a:lnTo>
-                    <a:pt x="3581126" y="1053251"/>
-                  </a:lnTo>
-                  <a:lnTo>
-                    <a:pt x="3652748" y="1038708"/>
-                  </a:lnTo>
-                  <a:lnTo>
-                    <a:pt x="3724371" y="1023939"/>
-                  </a:lnTo>
-                  <a:lnTo>
-                    <a:pt x="3795993" y="1008944"/>
-                  </a:lnTo>
-                  <a:lnTo>
-                    <a:pt x="3867616" y="993716"/>
-                  </a:lnTo>
-                  <a:lnTo>
-                    <a:pt x="3939238" y="978254"/>
-                  </a:lnTo>
-                  <a:lnTo>
-                    <a:pt x="4010861" y="962554"/>
-                  </a:lnTo>
-                  <a:lnTo>
-                    <a:pt x="4082483" y="946611"/>
-                  </a:lnTo>
-                  <a:lnTo>
-                    <a:pt x="4154106" y="930423"/>
-                  </a:lnTo>
-                  <a:lnTo>
-                    <a:pt x="4225729" y="913984"/>
-                  </a:lnTo>
-                  <a:lnTo>
-                    <a:pt x="4297351" y="897293"/>
-                  </a:lnTo>
-                  <a:lnTo>
-                    <a:pt x="4368974" y="880343"/>
-                  </a:lnTo>
-                  <a:lnTo>
-                    <a:pt x="4440596" y="863133"/>
-                  </a:lnTo>
-                  <a:lnTo>
-                    <a:pt x="4512219" y="845657"/>
-                  </a:lnTo>
-                  <a:lnTo>
-                    <a:pt x="4583841" y="827911"/>
-                  </a:lnTo>
-                  <a:lnTo>
-                    <a:pt x="4655464" y="809892"/>
-                  </a:lnTo>
-                  <a:lnTo>
-                    <a:pt x="4727086" y="791595"/>
-                  </a:lnTo>
-                  <a:lnTo>
-                    <a:pt x="4798709" y="773015"/>
-                  </a:lnTo>
-                  <a:lnTo>
-                    <a:pt x="4870331" y="754149"/>
-                  </a:lnTo>
-                  <a:lnTo>
-                    <a:pt x="4941954" y="734992"/>
-                  </a:lnTo>
-                  <a:lnTo>
-                    <a:pt x="5013576" y="715540"/>
-                  </a:lnTo>
-                  <a:lnTo>
-                    <a:pt x="5085199" y="695787"/>
-                  </a:lnTo>
-                  <a:lnTo>
-                    <a:pt x="5156821" y="675730"/>
-                  </a:lnTo>
-                  <a:lnTo>
-                    <a:pt x="5228444" y="655364"/>
-                  </a:lnTo>
-                  <a:lnTo>
-                    <a:pt x="5300066" y="634683"/>
-                  </a:lnTo>
-                  <a:lnTo>
-                    <a:pt x="5371689" y="613684"/>
-                  </a:lnTo>
-                  <a:lnTo>
-                    <a:pt x="5443311" y="592360"/>
-                  </a:lnTo>
-                  <a:lnTo>
-                    <a:pt x="5514934" y="570708"/>
-                  </a:lnTo>
-                  <a:lnTo>
-                    <a:pt x="5586557" y="548722"/>
-                  </a:lnTo>
-                  <a:lnTo>
-                    <a:pt x="5658179" y="526396"/>
-                  </a:lnTo>
-                  <a:lnTo>
-                    <a:pt x="5729802" y="503727"/>
-                  </a:lnTo>
-                  <a:lnTo>
-                    <a:pt x="5801424" y="480707"/>
-                  </a:lnTo>
-                  <a:lnTo>
-                    <a:pt x="5873047" y="457333"/>
-                  </a:lnTo>
-                  <a:lnTo>
-                    <a:pt x="5944669" y="433598"/>
-                  </a:lnTo>
-                  <a:lnTo>
-                    <a:pt x="6016292" y="409497"/>
-                  </a:lnTo>
-                  <a:lnTo>
-                    <a:pt x="6087914" y="385025"/>
-                  </a:lnTo>
-                  <a:lnTo>
-                    <a:pt x="6159537" y="360175"/>
-                  </a:lnTo>
-                  <a:lnTo>
-                    <a:pt x="6231159" y="334941"/>
-                  </a:lnTo>
-                  <a:lnTo>
-                    <a:pt x="6302782" y="309319"/>
-                  </a:lnTo>
-                  <a:lnTo>
-                    <a:pt x="6374404" y="283301"/>
-                  </a:lnTo>
-                  <a:lnTo>
-                    <a:pt x="6446027" y="256882"/>
-                  </a:lnTo>
-                  <a:lnTo>
-                    <a:pt x="6517649" y="230055"/>
-                  </a:lnTo>
-                  <a:lnTo>
-                    <a:pt x="6589272" y="202815"/>
-                  </a:lnTo>
-                  <a:lnTo>
-                    <a:pt x="6660894" y="175155"/>
-                  </a:lnTo>
-                  <a:lnTo>
-                    <a:pt x="6732517" y="147068"/>
-                  </a:lnTo>
-                  <a:lnTo>
-                    <a:pt x="6804139" y="118547"/>
-                  </a:lnTo>
-                  <a:lnTo>
-                    <a:pt x="6875762" y="89587"/>
-                  </a:lnTo>
-                  <a:lnTo>
-                    <a:pt x="6947385" y="60181"/>
-                  </a:lnTo>
-                  <a:lnTo>
-                    <a:pt x="7019007" y="30320"/>
+                    <a:pt x="71622" y="1566335"/>
+                  </a:lnTo>
+                  <a:lnTo>
+                    <a:pt x="143245" y="1559403"/>
+                  </a:lnTo>
+                  <a:lnTo>
+                    <a:pt x="214867" y="1552364"/>
+                  </a:lnTo>
+                  <a:lnTo>
+                    <a:pt x="286490" y="1545216"/>
+                  </a:lnTo>
+                  <a:lnTo>
+                    <a:pt x="358112" y="1537957"/>
+                  </a:lnTo>
+                  <a:lnTo>
+                    <a:pt x="429735" y="1530587"/>
+                  </a:lnTo>
+                  <a:lnTo>
+                    <a:pt x="501357" y="1523102"/>
+                  </a:lnTo>
+                  <a:lnTo>
+                    <a:pt x="572980" y="1515502"/>
+                  </a:lnTo>
+                  <a:lnTo>
+                    <a:pt x="644602" y="1507785"/>
+                  </a:lnTo>
+                  <a:lnTo>
+                    <a:pt x="716225" y="1499949"/>
+                  </a:lnTo>
+                  <a:lnTo>
+                    <a:pt x="787847" y="1491991"/>
+                  </a:lnTo>
+                  <a:lnTo>
+                    <a:pt x="859470" y="1483911"/>
+                  </a:lnTo>
+                  <a:lnTo>
+                    <a:pt x="931092" y="1475706"/>
+                  </a:lnTo>
+                  <a:lnTo>
+                    <a:pt x="1002715" y="1467375"/>
+                  </a:lnTo>
+                  <a:lnTo>
+                    <a:pt x="1074337" y="1458914"/>
+                  </a:lnTo>
+                  <a:lnTo>
+                    <a:pt x="1145960" y="1450323"/>
+                  </a:lnTo>
+                  <a:lnTo>
+                    <a:pt x="1217582" y="1441600"/>
+                  </a:lnTo>
+                  <a:lnTo>
+                    <a:pt x="1289205" y="1432742"/>
+                  </a:lnTo>
+                  <a:lnTo>
+                    <a:pt x="1360827" y="1423747"/>
+                  </a:lnTo>
+                  <a:lnTo>
+                    <a:pt x="1432450" y="1414613"/>
+                  </a:lnTo>
+                  <a:lnTo>
+                    <a:pt x="1504073" y="1405338"/>
+                  </a:lnTo>
+                  <a:lnTo>
+                    <a:pt x="1575695" y="1395920"/>
+                  </a:lnTo>
+                  <a:lnTo>
+                    <a:pt x="1647318" y="1386356"/>
+                  </a:lnTo>
+                  <a:lnTo>
+                    <a:pt x="1718940" y="1376645"/>
+                  </a:lnTo>
+                  <a:lnTo>
+                    <a:pt x="1790563" y="1366784"/>
+                  </a:lnTo>
+                  <a:lnTo>
+                    <a:pt x="1862185" y="1356771"/>
+                  </a:lnTo>
+                  <a:lnTo>
+                    <a:pt x="1933808" y="1346603"/>
+                  </a:lnTo>
+                  <a:lnTo>
+                    <a:pt x="2005430" y="1336278"/>
+                  </a:lnTo>
+                  <a:lnTo>
+                    <a:pt x="2077053" y="1325793"/>
+                  </a:lnTo>
+                  <a:lnTo>
+                    <a:pt x="2148675" y="1315147"/>
+                  </a:lnTo>
+                  <a:lnTo>
+                    <a:pt x="2220298" y="1304336"/>
+                  </a:lnTo>
+                  <a:lnTo>
+                    <a:pt x="2291920" y="1293359"/>
+                  </a:lnTo>
+                  <a:lnTo>
+                    <a:pt x="2363543" y="1282212"/>
+                  </a:lnTo>
+                  <a:lnTo>
+                    <a:pt x="2435165" y="1270893"/>
+                  </a:lnTo>
+                  <a:lnTo>
+                    <a:pt x="2506788" y="1259399"/>
+                  </a:lnTo>
+                  <a:lnTo>
+                    <a:pt x="2578410" y="1247727"/>
+                  </a:lnTo>
+                  <a:lnTo>
+                    <a:pt x="2650033" y="1235876"/>
+                  </a:lnTo>
+                  <a:lnTo>
+                    <a:pt x="2721655" y="1223841"/>
+                  </a:lnTo>
+                  <a:lnTo>
+                    <a:pt x="2793278" y="1211621"/>
+                  </a:lnTo>
+                  <a:lnTo>
+                    <a:pt x="2864901" y="1199212"/>
+                  </a:lnTo>
+                  <a:lnTo>
+                    <a:pt x="2936523" y="1186611"/>
+                  </a:lnTo>
+                  <a:lnTo>
+                    <a:pt x="3008146" y="1173816"/>
+                  </a:lnTo>
+                  <a:lnTo>
+                    <a:pt x="3079768" y="1160823"/>
+                  </a:lnTo>
+                  <a:lnTo>
+                    <a:pt x="3151391" y="1147630"/>
+                  </a:lnTo>
+                  <a:lnTo>
+                    <a:pt x="3223013" y="1134233"/>
+                  </a:lnTo>
+                  <a:lnTo>
+                    <a:pt x="3294636" y="1120629"/>
+                  </a:lnTo>
+                  <a:lnTo>
+                    <a:pt x="3366258" y="1106815"/>
+                  </a:lnTo>
+                  <a:lnTo>
+                    <a:pt x="3437881" y="1092788"/>
+                  </a:lnTo>
+                  <a:lnTo>
+                    <a:pt x="3509503" y="1078544"/>
+                  </a:lnTo>
+                  <a:lnTo>
+                    <a:pt x="3581126" y="1064081"/>
+                  </a:lnTo>
+                  <a:lnTo>
+                    <a:pt x="3652748" y="1049394"/>
+                  </a:lnTo>
+                  <a:lnTo>
+                    <a:pt x="3724371" y="1034480"/>
+                  </a:lnTo>
+                  <a:lnTo>
+                    <a:pt x="3795993" y="1019336"/>
+                  </a:lnTo>
+                  <a:lnTo>
+                    <a:pt x="3867616" y="1003958"/>
+                  </a:lnTo>
+                  <a:lnTo>
+                    <a:pt x="3939238" y="988343"/>
+                  </a:lnTo>
+                  <a:lnTo>
+                    <a:pt x="4010861" y="972487"/>
+                  </a:lnTo>
+                  <a:lnTo>
+                    <a:pt x="4082483" y="956385"/>
+                  </a:lnTo>
+                  <a:lnTo>
+                    <a:pt x="4154106" y="940036"/>
+                  </a:lnTo>
+                  <a:lnTo>
+                    <a:pt x="4225729" y="923434"/>
+                  </a:lnTo>
+                  <a:lnTo>
+                    <a:pt x="4297351" y="906575"/>
+                  </a:lnTo>
+                  <a:lnTo>
+                    <a:pt x="4368974" y="889456"/>
+                  </a:lnTo>
+                  <a:lnTo>
+                    <a:pt x="4440596" y="872073"/>
+                  </a:lnTo>
+                  <a:lnTo>
+                    <a:pt x="4512219" y="854422"/>
+                  </a:lnTo>
+                  <a:lnTo>
+                    <a:pt x="4583841" y="836498"/>
+                  </a:lnTo>
+                  <a:lnTo>
+                    <a:pt x="4655464" y="818297"/>
+                  </a:lnTo>
+                  <a:lnTo>
+                    <a:pt x="4727086" y="799815"/>
+                  </a:lnTo>
+                  <a:lnTo>
+                    <a:pt x="4798709" y="781048"/>
+                  </a:lnTo>
+                  <a:lnTo>
+                    <a:pt x="4870331" y="761991"/>
+                  </a:lnTo>
+                  <a:lnTo>
+                    <a:pt x="4941954" y="742640"/>
+                  </a:lnTo>
+                  <a:lnTo>
+                    <a:pt x="5013576" y="722990"/>
+                  </a:lnTo>
+                  <a:lnTo>
+                    <a:pt x="5085199" y="703037"/>
+                  </a:lnTo>
+                  <a:lnTo>
+                    <a:pt x="5156821" y="682775"/>
+                  </a:lnTo>
+                  <a:lnTo>
+                    <a:pt x="5228444" y="662201"/>
+                  </a:lnTo>
+                  <a:lnTo>
+                    <a:pt x="5300066" y="641309"/>
+                  </a:lnTo>
+                  <a:lnTo>
+                    <a:pt x="5371689" y="620095"/>
+                  </a:lnTo>
+                  <a:lnTo>
+                    <a:pt x="5443311" y="598553"/>
+                  </a:lnTo>
+                  <a:lnTo>
+                    <a:pt x="5514934" y="576678"/>
+                  </a:lnTo>
+                  <a:lnTo>
+                    <a:pt x="5586557" y="554466"/>
+                  </a:lnTo>
+                  <a:lnTo>
+                    <a:pt x="5658179" y="531911"/>
+                  </a:lnTo>
+                  <a:lnTo>
+                    <a:pt x="5729802" y="509007"/>
+                  </a:lnTo>
+                  <a:lnTo>
+                    <a:pt x="5801424" y="485750"/>
+                  </a:lnTo>
+                  <a:lnTo>
+                    <a:pt x="5873047" y="462134"/>
+                  </a:lnTo>
+                  <a:lnTo>
+                    <a:pt x="5944669" y="438153"/>
+                  </a:lnTo>
+                  <a:lnTo>
+                    <a:pt x="6016292" y="413802"/>
+                  </a:lnTo>
+                  <a:lnTo>
+                    <a:pt x="6087914" y="389075"/>
+                  </a:lnTo>
+                  <a:lnTo>
+                    <a:pt x="6159537" y="363966"/>
+                  </a:lnTo>
+                  <a:lnTo>
+                    <a:pt x="6231159" y="338470"/>
+                  </a:lnTo>
+                  <a:lnTo>
+                    <a:pt x="6302782" y="312580"/>
+                  </a:lnTo>
+                  <a:lnTo>
+                    <a:pt x="6374404" y="286290"/>
+                  </a:lnTo>
+                  <a:lnTo>
+                    <a:pt x="6446027" y="259594"/>
+                  </a:lnTo>
+                  <a:lnTo>
+                    <a:pt x="6517649" y="232486"/>
+                  </a:lnTo>
+                  <a:lnTo>
+                    <a:pt x="6589272" y="204959"/>
+                  </a:lnTo>
+                  <a:lnTo>
+                    <a:pt x="6660894" y="177008"/>
+                  </a:lnTo>
+                  <a:lnTo>
+                    <a:pt x="6732517" y="148625"/>
+                  </a:lnTo>
+                  <a:lnTo>
+                    <a:pt x="6804139" y="119804"/>
+                  </a:lnTo>
+                  <a:lnTo>
+                    <a:pt x="6875762" y="90537"/>
+                  </a:lnTo>
+                  <a:lnTo>
+                    <a:pt x="6947385" y="60819"/>
+                  </a:lnTo>
+                  <a:lnTo>
+                    <a:pt x="7019007" y="30642"/>
                   </a:lnTo>
                   <a:lnTo>
                     <a:pt x="7090630" y="0"/>
@@ -4446,7 +4446,7 @@
           </p:nvSpPr>
           <p:spPr>
             <a:xfrm>
-              <a:off x="4374536" y="1896563"/>
+              <a:off x="4334057" y="1896563"/>
               <a:ext cx="0" cy="3826579"/>
             </a:xfrm>
             <a:custGeom>
@@ -4719,7 +4719,7 @@
           </p:nvSpPr>
           <p:spPr>
             <a:xfrm>
-              <a:off x="2009531" y="5785772"/>
+              <a:off x="2008892" y="5785772"/>
               <a:ext cx="223753" cy="80101"/>
             </a:xfrm>
             <a:prstGeom prst="rect">
@@ -4765,7 +4765,7 @@
           </p:nvSpPr>
           <p:spPr>
             <a:xfrm>
-              <a:off x="4372762" y="5785772"/>
+              <a:off x="4369739" y="5785772"/>
               <a:ext cx="62179" cy="80101"/>
             </a:xfrm>
             <a:prstGeom prst="rect">
@@ -4811,7 +4811,7 @@
           </p:nvSpPr>
           <p:spPr>
             <a:xfrm>
-              <a:off x="6593026" y="5785772"/>
+              <a:off x="6587619" y="5785772"/>
               <a:ext cx="186537" cy="80101"/>
             </a:xfrm>
             <a:prstGeom prst="rect">
